--- a/dist/assets/LDPC-Seminar.pptx
+++ b/dist/assets/LDPC-Seminar.pptx
@@ -2217,7 +2217,7 @@
     <p:bg>
       <p:bgPr>
         <a:solidFill>
-          <a:srgbClr val="F6F4ED"/>
+          <a:srgbClr val="E5D7B7"/>
         </a:solidFill>
       </p:bgPr>
     </p:bg>
@@ -2262,7 +2262,7 @@
             <a:r>
               <a:rPr lang="en-US" sz="900" spc="100" kern="0" dirty="0">
                 <a:solidFill>
-                  <a:srgbClr val="4C7158"/>
+                  <a:srgbClr val="65713F"/>
                 </a:solidFill>
                 <a:latin typeface="Aptos Mono" pitchFamily="34" charset="0"/>
                 <a:ea typeface="Aptos Mono" pitchFamily="34" charset="-122"/>
@@ -2301,7 +2301,7 @@
             <a:r>
               <a:rPr lang="en-US" sz="800" spc="100" kern="0" dirty="0">
                 <a:solidFill>
-                  <a:srgbClr val="88967B"/>
+                  <a:srgbClr val="756B59"/>
                 </a:solidFill>
                 <a:latin typeface="Aptos" pitchFamily="34" charset="0"/>
                 <a:ea typeface="Aptos" pitchFamily="34" charset="-122"/>
@@ -2330,7 +2330,7 @@
           <a:noFill/>
           <a:ln w="8890">
             <a:solidFill>
-              <a:srgbClr val="DDE1D3"/>
+              <a:srgbClr val="C6B996"/>
             </a:solidFill>
             <a:prstDash val="solid"/>
             <a:headEnd type="none"/>
@@ -2355,7 +2355,7 @@
           <a:noFill/>
           <a:ln w="8890">
             <a:solidFill>
-              <a:srgbClr val="DDE1D3"/>
+              <a:srgbClr val="C6B996"/>
             </a:solidFill>
             <a:prstDash val="solid"/>
             <a:headEnd type="none"/>
@@ -2390,7 +2390,7 @@
             <a:r>
               <a:rPr lang="en-US" sz="800" spc="100" kern="0" dirty="0">
                 <a:solidFill>
-                  <a:srgbClr val="88967B"/>
+                  <a:srgbClr val="756B59"/>
                 </a:solidFill>
                 <a:latin typeface="Aptos" pitchFamily="34" charset="0"/>
                 <a:ea typeface="Aptos" pitchFamily="34" charset="-122"/>
@@ -2429,7 +2429,7 @@
             <a:r>
               <a:rPr lang="en-US" sz="900" dirty="0">
                 <a:solidFill>
-                  <a:srgbClr val="4C7158"/>
+                  <a:srgbClr val="65713F"/>
                 </a:solidFill>
                 <a:latin typeface="Aptos Mono" pitchFamily="34" charset="0"/>
                 <a:ea typeface="Aptos Mono" pitchFamily="34" charset="-122"/>
@@ -2468,7 +2468,7 @@
             <a:r>
               <a:rPr lang="en-US" sz="900" spc="150" kern="0" dirty="0">
                 <a:solidFill>
-                  <a:srgbClr val="88967B"/>
+                  <a:srgbClr val="756B59"/>
                 </a:solidFill>
                 <a:latin typeface="Aptos Mono" pitchFamily="34" charset="0"/>
                 <a:ea typeface="Aptos Mono" pitchFamily="34" charset="-122"/>
@@ -2510,7 +2510,7 @@
             <a:r>
               <a:rPr lang="en-US" sz="5100" dirty="0">
                 <a:solidFill>
-                  <a:srgbClr val="29372E"/>
+                  <a:srgbClr val="3C3836"/>
                 </a:solidFill>
                 <a:latin typeface="Georgia" pitchFamily="34" charset="0"/>
                 <a:ea typeface="Georgia" pitchFamily="34" charset="-122"/>
@@ -2530,7 +2530,7 @@
             <a:r>
               <a:rPr lang="en-US" sz="5100" dirty="0">
                 <a:solidFill>
-                  <a:srgbClr val="29372E"/>
+                  <a:srgbClr val="3C3836"/>
                 </a:solidFill>
                 <a:latin typeface="Georgia" pitchFamily="34" charset="0"/>
                 <a:ea typeface="Georgia" pitchFamily="34" charset="-122"/>
@@ -2569,7 +2569,7 @@
             <a:r>
               <a:rPr lang="en-US" sz="1900" dirty="0">
                 <a:solidFill>
-                  <a:srgbClr val="88967B"/>
+                  <a:srgbClr val="756B59"/>
                 </a:solidFill>
                 <a:latin typeface="Aptos" pitchFamily="34" charset="0"/>
                 <a:ea typeface="Aptos" pitchFamily="34" charset="-122"/>
@@ -2608,7 +2608,7 @@
             <a:r>
               <a:rPr lang="en-US" sz="1400" i="1" dirty="0">
                 <a:solidFill>
-                  <a:srgbClr val="4C7158"/>
+                  <a:srgbClr val="65713F"/>
                 </a:solidFill>
                 <a:latin typeface="Georgia" pitchFamily="34" charset="0"/>
                 <a:ea typeface="Georgia" pitchFamily="34" charset="-122"/>
@@ -3072,7 +3072,7 @@
             <a:r>
               <a:rPr lang="en-US" sz="1000" i="1" dirty="0">
                 <a:solidFill>
-                  <a:srgbClr val="88967B"/>
+                  <a:srgbClr val="756B59"/>
                 </a:solidFill>
                 <a:latin typeface="Georgia" pitchFamily="34" charset="0"/>
                 <a:ea typeface="Georgia" pitchFamily="34" charset="-122"/>
@@ -3136,7 +3136,7 @@
             <a:r>
               <a:rPr lang="en-US" sz="1000" i="1" dirty="0">
                 <a:solidFill>
-                  <a:srgbClr val="88967B"/>
+                  <a:srgbClr val="756B59"/>
                 </a:solidFill>
                 <a:latin typeface="Georgia" pitchFamily="34" charset="0"/>
                 <a:ea typeface="Georgia" pitchFamily="34" charset="-122"/>
@@ -3200,7 +3200,7 @@
             <a:r>
               <a:rPr lang="en-US" sz="1000" i="1" dirty="0">
                 <a:solidFill>
-                  <a:srgbClr val="88967B"/>
+                  <a:srgbClr val="756B59"/>
                 </a:solidFill>
                 <a:latin typeface="Georgia" pitchFamily="34" charset="0"/>
                 <a:ea typeface="Georgia" pitchFamily="34" charset="-122"/>
@@ -3231,7 +3231,7 @@
           </a:solidFill>
           <a:ln w="6350">
             <a:solidFill>
-              <a:srgbClr val="BA7758"/>
+              <a:srgbClr val="AF643C"/>
             </a:solidFill>
             <a:prstDash val="solid"/>
           </a:ln>
@@ -3264,7 +3264,7 @@
             <a:r>
               <a:rPr lang="en-US" sz="1000" i="1" dirty="0">
                 <a:solidFill>
-                  <a:srgbClr val="88967B"/>
+                  <a:srgbClr val="756B59"/>
                 </a:solidFill>
                 <a:latin typeface="Georgia" pitchFamily="34" charset="0"/>
                 <a:ea typeface="Georgia" pitchFamily="34" charset="-122"/>
@@ -3328,7 +3328,7 @@
             <a:r>
               <a:rPr lang="en-US" sz="1000" i="1" dirty="0">
                 <a:solidFill>
-                  <a:srgbClr val="88967B"/>
+                  <a:srgbClr val="756B59"/>
                 </a:solidFill>
                 <a:latin typeface="Georgia" pitchFamily="34" charset="0"/>
                 <a:ea typeface="Georgia" pitchFamily="34" charset="-122"/>
@@ -3392,7 +3392,7 @@
             <a:r>
               <a:rPr lang="en-US" sz="1000" i="1" dirty="0">
                 <a:solidFill>
-                  <a:srgbClr val="88967B"/>
+                  <a:srgbClr val="756B59"/>
                 </a:solidFill>
                 <a:latin typeface="Georgia" pitchFamily="34" charset="0"/>
                 <a:ea typeface="Georgia" pitchFamily="34" charset="-122"/>
@@ -3456,7 +3456,7 @@
             <a:r>
               <a:rPr lang="en-US" sz="1000" i="1" dirty="0">
                 <a:solidFill>
-                  <a:srgbClr val="88967B"/>
+                  <a:srgbClr val="756B59"/>
                 </a:solidFill>
                 <a:latin typeface="Georgia" pitchFamily="34" charset="0"/>
                 <a:ea typeface="Georgia" pitchFamily="34" charset="-122"/>
@@ -3520,7 +3520,7 @@
             <a:r>
               <a:rPr lang="en-US" sz="1000" i="1" dirty="0">
                 <a:solidFill>
-                  <a:srgbClr val="88967B"/>
+                  <a:srgbClr val="756B59"/>
                 </a:solidFill>
                 <a:latin typeface="Georgia" pitchFamily="34" charset="0"/>
                 <a:ea typeface="Georgia" pitchFamily="34" charset="-122"/>
@@ -3584,7 +3584,7 @@
             <a:r>
               <a:rPr lang="en-US" sz="1000" i="1" dirty="0">
                 <a:solidFill>
-                  <a:srgbClr val="88967B"/>
+                  <a:srgbClr val="756B59"/>
                 </a:solidFill>
                 <a:latin typeface="Georgia" pitchFamily="34" charset="0"/>
                 <a:ea typeface="Georgia" pitchFamily="34" charset="-122"/>
@@ -3648,7 +3648,7 @@
             <a:r>
               <a:rPr lang="en-US" sz="1000" i="1" dirty="0">
                 <a:solidFill>
-                  <a:srgbClr val="88967B"/>
+                  <a:srgbClr val="756B59"/>
                 </a:solidFill>
                 <a:latin typeface="Georgia" pitchFamily="34" charset="0"/>
                 <a:ea typeface="Georgia" pitchFamily="34" charset="-122"/>
@@ -3712,7 +3712,7 @@
             <a:r>
               <a:rPr lang="en-US" sz="1000" i="1" dirty="0">
                 <a:solidFill>
-                  <a:srgbClr val="88967B"/>
+                  <a:srgbClr val="756B59"/>
                 </a:solidFill>
                 <a:latin typeface="Georgia" pitchFamily="34" charset="0"/>
                 <a:ea typeface="Georgia" pitchFamily="34" charset="-122"/>
@@ -3776,7 +3776,7 @@
             <a:r>
               <a:rPr lang="en-US" sz="1000" i="1" dirty="0">
                 <a:solidFill>
-                  <a:srgbClr val="88967B"/>
+                  <a:srgbClr val="756B59"/>
                 </a:solidFill>
                 <a:latin typeface="Georgia" pitchFamily="34" charset="0"/>
                 <a:ea typeface="Georgia" pitchFamily="34" charset="-122"/>
@@ -3802,7 +3802,7 @@
     <p:bg>
       <p:bgPr>
         <a:solidFill>
-          <a:srgbClr val="F6F4ED"/>
+          <a:srgbClr val="E5D7B7"/>
         </a:solidFill>
       </p:bgPr>
     </p:bg>
@@ -3847,7 +3847,7 @@
             <a:r>
               <a:rPr lang="en-US" sz="900" spc="100" kern="0" dirty="0">
                 <a:solidFill>
-                  <a:srgbClr val="4C7158"/>
+                  <a:srgbClr val="65713F"/>
                 </a:solidFill>
                 <a:latin typeface="Aptos Mono" pitchFamily="34" charset="0"/>
                 <a:ea typeface="Aptos Mono" pitchFamily="34" charset="-122"/>
@@ -3886,7 +3886,7 @@
             <a:r>
               <a:rPr lang="en-US" sz="800" spc="100" kern="0" dirty="0">
                 <a:solidFill>
-                  <a:srgbClr val="88967B"/>
+                  <a:srgbClr val="756B59"/>
                 </a:solidFill>
                 <a:latin typeface="Aptos" pitchFamily="34" charset="0"/>
                 <a:ea typeface="Aptos" pitchFamily="34" charset="-122"/>
@@ -3915,7 +3915,7 @@
           <a:noFill/>
           <a:ln w="8890">
             <a:solidFill>
-              <a:srgbClr val="DDE1D3"/>
+              <a:srgbClr val="C6B996"/>
             </a:solidFill>
             <a:prstDash val="solid"/>
             <a:headEnd type="none"/>
@@ -3940,7 +3940,7 @@
           <a:noFill/>
           <a:ln w="8890">
             <a:solidFill>
-              <a:srgbClr val="DDE1D3"/>
+              <a:srgbClr val="C6B996"/>
             </a:solidFill>
             <a:prstDash val="solid"/>
             <a:headEnd type="none"/>
@@ -3975,7 +3975,7 @@
             <a:r>
               <a:rPr lang="en-US" sz="800" spc="100" kern="0" dirty="0">
                 <a:solidFill>
-                  <a:srgbClr val="88967B"/>
+                  <a:srgbClr val="756B59"/>
                 </a:solidFill>
                 <a:latin typeface="Aptos" pitchFamily="34" charset="0"/>
                 <a:ea typeface="Aptos" pitchFamily="34" charset="-122"/>
@@ -4014,7 +4014,7 @@
             <a:r>
               <a:rPr lang="en-US" sz="900" dirty="0">
                 <a:solidFill>
-                  <a:srgbClr val="4C7158"/>
+                  <a:srgbClr val="65713F"/>
                 </a:solidFill>
                 <a:latin typeface="Aptos Mono" pitchFamily="34" charset="0"/>
                 <a:ea typeface="Aptos Mono" pitchFamily="34" charset="-122"/>
@@ -4053,7 +4053,7 @@
             <a:r>
               <a:rPr lang="en-US" sz="900" spc="150" kern="0" dirty="0">
                 <a:solidFill>
-                  <a:srgbClr val="88967B"/>
+                  <a:srgbClr val="756B59"/>
                 </a:solidFill>
                 <a:latin typeface="Aptos Mono" pitchFamily="34" charset="0"/>
                 <a:ea typeface="Aptos Mono" pitchFamily="34" charset="-122"/>
@@ -4094,7 +4094,7 @@
             <a:r>
               <a:rPr lang="en-US" sz="3400" dirty="0">
                 <a:solidFill>
-                  <a:srgbClr val="29372E"/>
+                  <a:srgbClr val="3C3836"/>
                 </a:solidFill>
                 <a:latin typeface="Georgia" pitchFamily="34" charset="0"/>
                 <a:ea typeface="Georgia" pitchFamily="34" charset="-122"/>
@@ -4135,7 +4135,7 @@
             <a:r>
               <a:rPr lang="en-US" sz="1600" dirty="0">
                 <a:solidFill>
-                  <a:srgbClr val="88967B"/>
+                  <a:srgbClr val="756B59"/>
                 </a:solidFill>
                 <a:latin typeface="Aptos" pitchFamily="34" charset="0"/>
                 <a:ea typeface="Aptos" pitchFamily="34" charset="-122"/>
@@ -4199,7 +4199,7 @@
             <a:r>
               <a:rPr lang="en-US" sz="900" dirty="0">
                 <a:solidFill>
-                  <a:srgbClr val="BA7758"/>
+                  <a:srgbClr val="AF643C"/>
                 </a:solidFill>
                 <a:latin typeface="Aptos Mono" pitchFamily="34" charset="0"/>
                 <a:ea typeface="Aptos Mono" pitchFamily="34" charset="-122"/>
@@ -4240,7 +4240,7 @@
             <a:r>
               <a:rPr lang="en-US" sz="2300" dirty="0">
                 <a:solidFill>
-                  <a:srgbClr val="29372E"/>
+                  <a:srgbClr val="3C3836"/>
                 </a:solidFill>
                 <a:latin typeface="Georgia" pitchFamily="34" charset="0"/>
                 <a:ea typeface="Georgia" pitchFamily="34" charset="-122"/>
@@ -4281,7 +4281,7 @@
             <a:r>
               <a:rPr lang="en-US" sz="1400" dirty="0">
                 <a:solidFill>
-                  <a:srgbClr val="88967B"/>
+                  <a:srgbClr val="756B59"/>
                 </a:solidFill>
                 <a:latin typeface="Aptos" pitchFamily="34" charset="0"/>
                 <a:ea typeface="Aptos" pitchFamily="34" charset="-122"/>
@@ -4345,7 +4345,7 @@
             <a:r>
               <a:rPr lang="en-US" sz="900" dirty="0">
                 <a:solidFill>
-                  <a:srgbClr val="BA7758"/>
+                  <a:srgbClr val="AF643C"/>
                 </a:solidFill>
                 <a:latin typeface="Aptos Mono" pitchFamily="34" charset="0"/>
                 <a:ea typeface="Aptos Mono" pitchFamily="34" charset="-122"/>
@@ -4386,7 +4386,7 @@
             <a:r>
               <a:rPr lang="en-US" sz="2300" dirty="0">
                 <a:solidFill>
-                  <a:srgbClr val="29372E"/>
+                  <a:srgbClr val="3C3836"/>
                 </a:solidFill>
                 <a:latin typeface="Georgia" pitchFamily="34" charset="0"/>
                 <a:ea typeface="Georgia" pitchFamily="34" charset="-122"/>
@@ -4427,7 +4427,7 @@
             <a:r>
               <a:rPr lang="en-US" sz="1400" dirty="0">
                 <a:solidFill>
-                  <a:srgbClr val="88967B"/>
+                  <a:srgbClr val="756B59"/>
                 </a:solidFill>
                 <a:latin typeface="Aptos" pitchFamily="34" charset="0"/>
                 <a:ea typeface="Aptos" pitchFamily="34" charset="-122"/>
@@ -4491,7 +4491,7 @@
             <a:r>
               <a:rPr lang="en-US" sz="900" dirty="0">
                 <a:solidFill>
-                  <a:srgbClr val="BA7758"/>
+                  <a:srgbClr val="AF643C"/>
                 </a:solidFill>
                 <a:latin typeface="Aptos Mono" pitchFamily="34" charset="0"/>
                 <a:ea typeface="Aptos Mono" pitchFamily="34" charset="-122"/>
@@ -4532,7 +4532,7 @@
             <a:r>
               <a:rPr lang="en-US" sz="2300" dirty="0">
                 <a:solidFill>
-                  <a:srgbClr val="29372E"/>
+                  <a:srgbClr val="3C3836"/>
                 </a:solidFill>
                 <a:latin typeface="Georgia" pitchFamily="34" charset="0"/>
                 <a:ea typeface="Georgia" pitchFamily="34" charset="-122"/>
@@ -4573,7 +4573,7 @@
             <a:r>
               <a:rPr lang="en-US" sz="1400" dirty="0">
                 <a:solidFill>
-                  <a:srgbClr val="88967B"/>
+                  <a:srgbClr val="756B59"/>
                 </a:solidFill>
                 <a:latin typeface="Aptos" pitchFamily="34" charset="0"/>
                 <a:ea typeface="Aptos" pitchFamily="34" charset="-122"/>
@@ -4614,7 +4614,7 @@
             <a:r>
               <a:rPr lang="en-US" sz="1900" i="1" dirty="0">
                 <a:solidFill>
-                  <a:srgbClr val="4C7158"/>
+                  <a:srgbClr val="65713F"/>
                 </a:solidFill>
                 <a:latin typeface="Georgia" pitchFamily="34" charset="0"/>
                 <a:ea typeface="Georgia" pitchFamily="34" charset="-122"/>
@@ -4640,7 +4640,7 @@
     <p:bg>
       <p:bgPr>
         <a:solidFill>
-          <a:srgbClr val="F6F4ED"/>
+          <a:srgbClr val="E5D7B7"/>
         </a:solidFill>
       </p:bgPr>
     </p:bg>
@@ -4685,7 +4685,7 @@
             <a:r>
               <a:rPr lang="en-US" sz="900" spc="100" kern="0" dirty="0">
                 <a:solidFill>
-                  <a:srgbClr val="4C7158"/>
+                  <a:srgbClr val="65713F"/>
                 </a:solidFill>
                 <a:latin typeface="Aptos Mono" pitchFamily="34" charset="0"/>
                 <a:ea typeface="Aptos Mono" pitchFamily="34" charset="-122"/>
@@ -4724,7 +4724,7 @@
             <a:r>
               <a:rPr lang="en-US" sz="800" spc="100" kern="0" dirty="0">
                 <a:solidFill>
-                  <a:srgbClr val="88967B"/>
+                  <a:srgbClr val="756B59"/>
                 </a:solidFill>
                 <a:latin typeface="Aptos" pitchFamily="34" charset="0"/>
                 <a:ea typeface="Aptos" pitchFamily="34" charset="-122"/>
@@ -4753,7 +4753,7 @@
           <a:noFill/>
           <a:ln w="8890">
             <a:solidFill>
-              <a:srgbClr val="DDE1D3"/>
+              <a:srgbClr val="C6B996"/>
             </a:solidFill>
             <a:prstDash val="solid"/>
             <a:headEnd type="none"/>
@@ -4778,7 +4778,7 @@
           <a:noFill/>
           <a:ln w="8890">
             <a:solidFill>
-              <a:srgbClr val="DDE1D3"/>
+              <a:srgbClr val="C6B996"/>
             </a:solidFill>
             <a:prstDash val="solid"/>
             <a:headEnd type="none"/>
@@ -4813,7 +4813,7 @@
             <a:r>
               <a:rPr lang="en-US" sz="800" spc="100" kern="0" dirty="0">
                 <a:solidFill>
-                  <a:srgbClr val="88967B"/>
+                  <a:srgbClr val="756B59"/>
                 </a:solidFill>
                 <a:latin typeface="Aptos" pitchFamily="34" charset="0"/>
                 <a:ea typeface="Aptos" pitchFamily="34" charset="-122"/>
@@ -4852,7 +4852,7 @@
             <a:r>
               <a:rPr lang="en-US" sz="900" dirty="0">
                 <a:solidFill>
-                  <a:srgbClr val="4C7158"/>
+                  <a:srgbClr val="65713F"/>
                 </a:solidFill>
                 <a:latin typeface="Aptos Mono" pitchFamily="34" charset="0"/>
                 <a:ea typeface="Aptos Mono" pitchFamily="34" charset="-122"/>
@@ -4891,7 +4891,7 @@
             <a:r>
               <a:rPr lang="en-US" sz="900" spc="150" kern="0" dirty="0">
                 <a:solidFill>
-                  <a:srgbClr val="88967B"/>
+                  <a:srgbClr val="756B59"/>
                 </a:solidFill>
                 <a:latin typeface="Aptos Mono" pitchFamily="34" charset="0"/>
                 <a:ea typeface="Aptos Mono" pitchFamily="34" charset="-122"/>
@@ -4932,7 +4932,7 @@
             <a:r>
               <a:rPr lang="en-US" sz="3400" dirty="0">
                 <a:solidFill>
-                  <a:srgbClr val="29372E"/>
+                  <a:srgbClr val="3C3836"/>
                 </a:solidFill>
                 <a:latin typeface="Georgia" pitchFamily="34" charset="0"/>
                 <a:ea typeface="Georgia" pitchFamily="34" charset="-122"/>
@@ -4973,7 +4973,7 @@
             <a:r>
               <a:rPr lang="en-US" sz="1600" dirty="0">
                 <a:solidFill>
-                  <a:srgbClr val="88967B"/>
+                  <a:srgbClr val="756B59"/>
                 </a:solidFill>
                 <a:latin typeface="Aptos" pitchFamily="34" charset="0"/>
                 <a:ea typeface="Aptos" pitchFamily="34" charset="-122"/>
@@ -5012,7 +5012,7 @@
             <a:r>
               <a:rPr lang="en-US" sz="1500" b="1" dirty="0">
                 <a:solidFill>
-                  <a:srgbClr val="4C7158"/>
+                  <a:srgbClr val="65713F"/>
                 </a:solidFill>
                 <a:latin typeface="Aptos" pitchFamily="34" charset="0"/>
                 <a:ea typeface="Aptos" pitchFamily="34" charset="-122"/>
@@ -5053,7 +5053,7 @@
             <a:r>
               <a:rPr lang="en-US" sz="1200" dirty="0">
                 <a:solidFill>
-                  <a:srgbClr val="88967B"/>
+                  <a:srgbClr val="756B59"/>
                 </a:solidFill>
                 <a:latin typeface="Aptos" pitchFamily="34" charset="0"/>
                 <a:ea typeface="Aptos" pitchFamily="34" charset="-122"/>
@@ -5092,7 +5092,7 @@
             <a:r>
               <a:rPr lang="en-US" sz="1500" b="1" dirty="0">
                 <a:solidFill>
-                  <a:srgbClr val="4C7158"/>
+                  <a:srgbClr val="65713F"/>
                 </a:solidFill>
                 <a:latin typeface="Aptos" pitchFamily="34" charset="0"/>
                 <a:ea typeface="Aptos" pitchFamily="34" charset="-122"/>
@@ -5133,7 +5133,7 @@
             <a:r>
               <a:rPr lang="en-US" sz="1200" dirty="0">
                 <a:solidFill>
-                  <a:srgbClr val="88967B"/>
+                  <a:srgbClr val="756B59"/>
                 </a:solidFill>
                 <a:latin typeface="Aptos" pitchFamily="34" charset="0"/>
                 <a:ea typeface="Aptos" pitchFamily="34" charset="-122"/>
@@ -5172,7 +5172,7 @@
             <a:r>
               <a:rPr lang="en-US" sz="1500" b="1" dirty="0">
                 <a:solidFill>
-                  <a:srgbClr val="4C7158"/>
+                  <a:srgbClr val="65713F"/>
                 </a:solidFill>
                 <a:latin typeface="Aptos" pitchFamily="34" charset="0"/>
                 <a:ea typeface="Aptos" pitchFamily="34" charset="-122"/>
@@ -5213,7 +5213,7 @@
             <a:r>
               <a:rPr lang="en-US" sz="1200" dirty="0">
                 <a:solidFill>
-                  <a:srgbClr val="88967B"/>
+                  <a:srgbClr val="756B59"/>
                 </a:solidFill>
                 <a:latin typeface="Aptos" pitchFamily="34" charset="0"/>
                 <a:ea typeface="Aptos" pitchFamily="34" charset="-122"/>
@@ -5241,8 +5241,8 @@
         </p:blipFill>
         <p:spPr>
           <a:xfrm>
-            <a:off x="6361483" y="2926080"/>
-            <a:ext cx="4513474" cy="2697480"/>
+            <a:off x="6206544" y="2926080"/>
+            <a:ext cx="4823351" cy="2697480"/>
           </a:xfrm>
           <a:prstGeom prst="rect">
             <a:avLst/>
@@ -5278,7 +5278,7 @@
             <a:r>
               <a:rPr lang="en-US" sz="1700" i="1" dirty="0">
                 <a:solidFill>
-                  <a:srgbClr val="4C7158"/>
+                  <a:srgbClr val="65713F"/>
                 </a:solidFill>
                 <a:latin typeface="Georgia" pitchFamily="34" charset="0"/>
                 <a:ea typeface="Georgia" pitchFamily="34" charset="-122"/>
@@ -5319,7 +5319,7 @@
             <a:r>
               <a:rPr lang="en-US" sz="1100" u="sng" dirty="0">
                 <a:solidFill>
-                  <a:srgbClr val="4C7158"/>
+                  <a:srgbClr val="65713F"/>
                 </a:solidFill>
                 <a:latin typeface="Aptos" pitchFamily="34" charset="0"/>
                 <a:ea typeface="Aptos" pitchFamily="34" charset="-122"/>
@@ -5352,7 +5352,7 @@
     <p:bg>
       <p:bgPr>
         <a:solidFill>
-          <a:srgbClr val="F6F4ED"/>
+          <a:srgbClr val="E5D7B7"/>
         </a:solidFill>
       </p:bgPr>
     </p:bg>
@@ -5397,7 +5397,7 @@
             <a:r>
               <a:rPr lang="en-US" sz="900" spc="100" kern="0" dirty="0">
                 <a:solidFill>
-                  <a:srgbClr val="4C7158"/>
+                  <a:srgbClr val="65713F"/>
                 </a:solidFill>
                 <a:latin typeface="Aptos Mono" pitchFamily="34" charset="0"/>
                 <a:ea typeface="Aptos Mono" pitchFamily="34" charset="-122"/>
@@ -5436,7 +5436,7 @@
             <a:r>
               <a:rPr lang="en-US" sz="800" spc="100" kern="0" dirty="0">
                 <a:solidFill>
-                  <a:srgbClr val="88967B"/>
+                  <a:srgbClr val="756B59"/>
                 </a:solidFill>
                 <a:latin typeface="Aptos" pitchFamily="34" charset="0"/>
                 <a:ea typeface="Aptos" pitchFamily="34" charset="-122"/>
@@ -5465,7 +5465,7 @@
           <a:noFill/>
           <a:ln w="8890">
             <a:solidFill>
-              <a:srgbClr val="DDE1D3"/>
+              <a:srgbClr val="C6B996"/>
             </a:solidFill>
             <a:prstDash val="solid"/>
             <a:headEnd type="none"/>
@@ -5490,7 +5490,7 @@
           <a:noFill/>
           <a:ln w="8890">
             <a:solidFill>
-              <a:srgbClr val="DDE1D3"/>
+              <a:srgbClr val="C6B996"/>
             </a:solidFill>
             <a:prstDash val="solid"/>
             <a:headEnd type="none"/>
@@ -5525,7 +5525,7 @@
             <a:r>
               <a:rPr lang="en-US" sz="800" spc="100" kern="0" dirty="0">
                 <a:solidFill>
-                  <a:srgbClr val="88967B"/>
+                  <a:srgbClr val="756B59"/>
                 </a:solidFill>
                 <a:latin typeface="Aptos" pitchFamily="34" charset="0"/>
                 <a:ea typeface="Aptos" pitchFamily="34" charset="-122"/>
@@ -5564,7 +5564,7 @@
             <a:r>
               <a:rPr lang="en-US" sz="900" dirty="0">
                 <a:solidFill>
-                  <a:srgbClr val="4C7158"/>
+                  <a:srgbClr val="65713F"/>
                 </a:solidFill>
                 <a:latin typeface="Aptos Mono" pitchFamily="34" charset="0"/>
                 <a:ea typeface="Aptos Mono" pitchFamily="34" charset="-122"/>
@@ -5603,7 +5603,7 @@
             <a:r>
               <a:rPr lang="en-US" sz="900" spc="150" kern="0" dirty="0">
                 <a:solidFill>
-                  <a:srgbClr val="88967B"/>
+                  <a:srgbClr val="756B59"/>
                 </a:solidFill>
                 <a:latin typeface="Aptos Mono" pitchFamily="34" charset="0"/>
                 <a:ea typeface="Aptos Mono" pitchFamily="34" charset="-122"/>
@@ -5644,7 +5644,7 @@
             <a:r>
               <a:rPr lang="en-US" sz="3400" dirty="0">
                 <a:solidFill>
-                  <a:srgbClr val="29372E"/>
+                  <a:srgbClr val="3C3836"/>
                 </a:solidFill>
                 <a:latin typeface="Georgia" pitchFamily="34" charset="0"/>
                 <a:ea typeface="Georgia" pitchFamily="34" charset="-122"/>
@@ -5685,7 +5685,7 @@
             <a:r>
               <a:rPr lang="en-US" sz="1600" dirty="0">
                 <a:solidFill>
-                  <a:srgbClr val="88967B"/>
+                  <a:srgbClr val="756B59"/>
                 </a:solidFill>
                 <a:latin typeface="Aptos" pitchFamily="34" charset="0"/>
                 <a:ea typeface="Aptos" pitchFamily="34" charset="-122"/>
@@ -5724,7 +5724,7 @@
             <a:r>
               <a:rPr lang="en-US" sz="1500" b="1" dirty="0">
                 <a:solidFill>
-                  <a:srgbClr val="4C7158"/>
+                  <a:srgbClr val="65713F"/>
                 </a:solidFill>
                 <a:latin typeface="Aptos" pitchFamily="34" charset="0"/>
                 <a:ea typeface="Aptos" pitchFamily="34" charset="-122"/>
@@ -5765,7 +5765,7 @@
             <a:r>
               <a:rPr lang="en-US" sz="1200" dirty="0">
                 <a:solidFill>
-                  <a:srgbClr val="88967B"/>
+                  <a:srgbClr val="756B59"/>
                 </a:solidFill>
                 <a:latin typeface="Aptos" pitchFamily="34" charset="0"/>
                 <a:ea typeface="Aptos" pitchFamily="34" charset="-122"/>
@@ -5804,7 +5804,7 @@
             <a:r>
               <a:rPr lang="en-US" sz="1500" b="1" dirty="0">
                 <a:solidFill>
-                  <a:srgbClr val="4C7158"/>
+                  <a:srgbClr val="65713F"/>
                 </a:solidFill>
                 <a:latin typeface="Aptos" pitchFamily="34" charset="0"/>
                 <a:ea typeface="Aptos" pitchFamily="34" charset="-122"/>
@@ -5845,7 +5845,7 @@
             <a:r>
               <a:rPr lang="en-US" sz="1200" dirty="0">
                 <a:solidFill>
-                  <a:srgbClr val="88967B"/>
+                  <a:srgbClr val="756B59"/>
                 </a:solidFill>
                 <a:latin typeface="Aptos" pitchFamily="34" charset="0"/>
                 <a:ea typeface="Aptos" pitchFamily="34" charset="-122"/>
@@ -5884,7 +5884,7 @@
             <a:r>
               <a:rPr lang="en-US" sz="1500" b="1" dirty="0">
                 <a:solidFill>
-                  <a:srgbClr val="4C7158"/>
+                  <a:srgbClr val="65713F"/>
                 </a:solidFill>
                 <a:latin typeface="Aptos" pitchFamily="34" charset="0"/>
                 <a:ea typeface="Aptos" pitchFamily="34" charset="-122"/>
@@ -5925,7 +5925,7 @@
             <a:r>
               <a:rPr lang="en-US" sz="1200" dirty="0">
                 <a:solidFill>
-                  <a:srgbClr val="88967B"/>
+                  <a:srgbClr val="756B59"/>
                 </a:solidFill>
                 <a:latin typeface="Aptos" pitchFamily="34" charset="0"/>
                 <a:ea typeface="Aptos" pitchFamily="34" charset="-122"/>
@@ -5953,8 +5953,8 @@
         </p:blipFill>
         <p:spPr>
           <a:xfrm>
-            <a:off x="5943600" y="3368338"/>
-            <a:ext cx="5349240" cy="1812964"/>
+            <a:off x="5943600" y="3077434"/>
+            <a:ext cx="5349240" cy="2394771"/>
           </a:xfrm>
           <a:prstGeom prst="rect">
             <a:avLst/>
@@ -5988,7 +5988,7 @@
             <a:r>
               <a:rPr lang="en-US" sz="900" dirty="0">
                 <a:solidFill>
-                  <a:srgbClr val="88967B"/>
+                  <a:srgbClr val="756B59"/>
                 </a:solidFill>
                 <a:latin typeface="Aptos" pitchFamily="34" charset="0"/>
                 <a:ea typeface="Aptos" pitchFamily="34" charset="-122"/>
@@ -6014,7 +6014,7 @@
     <p:bg>
       <p:bgPr>
         <a:solidFill>
-          <a:srgbClr val="F6F4ED"/>
+          <a:srgbClr val="E5D7B7"/>
         </a:solidFill>
       </p:bgPr>
     </p:bg>
@@ -6059,7 +6059,7 @@
             <a:r>
               <a:rPr lang="en-US" sz="900" spc="100" kern="0" dirty="0">
                 <a:solidFill>
-                  <a:srgbClr val="4C7158"/>
+                  <a:srgbClr val="65713F"/>
                 </a:solidFill>
                 <a:latin typeface="Aptos Mono" pitchFamily="34" charset="0"/>
                 <a:ea typeface="Aptos Mono" pitchFamily="34" charset="-122"/>
@@ -6098,7 +6098,7 @@
             <a:r>
               <a:rPr lang="en-US" sz="800" spc="100" kern="0" dirty="0">
                 <a:solidFill>
-                  <a:srgbClr val="88967B"/>
+                  <a:srgbClr val="756B59"/>
                 </a:solidFill>
                 <a:latin typeface="Aptos" pitchFamily="34" charset="0"/>
                 <a:ea typeface="Aptos" pitchFamily="34" charset="-122"/>
@@ -6127,7 +6127,7 @@
           <a:noFill/>
           <a:ln w="8890">
             <a:solidFill>
-              <a:srgbClr val="DDE1D3"/>
+              <a:srgbClr val="C6B996"/>
             </a:solidFill>
             <a:prstDash val="solid"/>
             <a:headEnd type="none"/>
@@ -6152,7 +6152,7 @@
           <a:noFill/>
           <a:ln w="8890">
             <a:solidFill>
-              <a:srgbClr val="DDE1D3"/>
+              <a:srgbClr val="C6B996"/>
             </a:solidFill>
             <a:prstDash val="solid"/>
             <a:headEnd type="none"/>
@@ -6187,7 +6187,7 @@
             <a:r>
               <a:rPr lang="en-US" sz="800" spc="100" kern="0" dirty="0">
                 <a:solidFill>
-                  <a:srgbClr val="88967B"/>
+                  <a:srgbClr val="756B59"/>
                 </a:solidFill>
                 <a:latin typeface="Aptos" pitchFamily="34" charset="0"/>
                 <a:ea typeface="Aptos" pitchFamily="34" charset="-122"/>
@@ -6226,7 +6226,7 @@
             <a:r>
               <a:rPr lang="en-US" sz="900" dirty="0">
                 <a:solidFill>
-                  <a:srgbClr val="4C7158"/>
+                  <a:srgbClr val="65713F"/>
                 </a:solidFill>
                 <a:latin typeface="Aptos Mono" pitchFamily="34" charset="0"/>
                 <a:ea typeface="Aptos Mono" pitchFamily="34" charset="-122"/>
@@ -6265,7 +6265,7 @@
             <a:r>
               <a:rPr lang="en-US" sz="900" spc="150" kern="0" dirty="0">
                 <a:solidFill>
-                  <a:srgbClr val="88967B"/>
+                  <a:srgbClr val="756B59"/>
                 </a:solidFill>
                 <a:latin typeface="Aptos Mono" pitchFamily="34" charset="0"/>
                 <a:ea typeface="Aptos Mono" pitchFamily="34" charset="-122"/>
@@ -6306,7 +6306,7 @@
             <a:r>
               <a:rPr lang="en-US" sz="3400" dirty="0">
                 <a:solidFill>
-                  <a:srgbClr val="29372E"/>
+                  <a:srgbClr val="3C3836"/>
                 </a:solidFill>
                 <a:latin typeface="Georgia" pitchFamily="34" charset="0"/>
                 <a:ea typeface="Georgia" pitchFamily="34" charset="-122"/>
@@ -6347,7 +6347,7 @@
             <a:r>
               <a:rPr lang="en-US" sz="1600" dirty="0">
                 <a:solidFill>
-                  <a:srgbClr val="88967B"/>
+                  <a:srgbClr val="756B59"/>
                 </a:solidFill>
                 <a:latin typeface="Aptos" pitchFamily="34" charset="0"/>
                 <a:ea typeface="Aptos" pitchFamily="34" charset="-122"/>
@@ -6386,7 +6386,7 @@
             <a:r>
               <a:rPr lang="en-US" sz="1500" b="1" dirty="0">
                 <a:solidFill>
-                  <a:srgbClr val="4C7158"/>
+                  <a:srgbClr val="65713F"/>
                 </a:solidFill>
                 <a:latin typeface="Aptos" pitchFamily="34" charset="0"/>
                 <a:ea typeface="Aptos" pitchFamily="34" charset="-122"/>
@@ -6427,7 +6427,7 @@
             <a:r>
               <a:rPr lang="en-US" sz="1200" dirty="0">
                 <a:solidFill>
-                  <a:srgbClr val="88967B"/>
+                  <a:srgbClr val="756B59"/>
                 </a:solidFill>
                 <a:latin typeface="Aptos" pitchFamily="34" charset="0"/>
                 <a:ea typeface="Aptos" pitchFamily="34" charset="-122"/>
@@ -6466,7 +6466,7 @@
             <a:r>
               <a:rPr lang="en-US" sz="1500" b="1" dirty="0">
                 <a:solidFill>
-                  <a:srgbClr val="4C7158"/>
+                  <a:srgbClr val="65713F"/>
                 </a:solidFill>
                 <a:latin typeface="Aptos" pitchFamily="34" charset="0"/>
                 <a:ea typeface="Aptos" pitchFamily="34" charset="-122"/>
@@ -6507,7 +6507,7 @@
             <a:r>
               <a:rPr lang="en-US" sz="1200" dirty="0">
                 <a:solidFill>
-                  <a:srgbClr val="88967B"/>
+                  <a:srgbClr val="756B59"/>
                 </a:solidFill>
                 <a:latin typeface="Aptos" pitchFamily="34" charset="0"/>
                 <a:ea typeface="Aptos" pitchFamily="34" charset="-122"/>
@@ -6546,7 +6546,7 @@
             <a:r>
               <a:rPr lang="en-US" sz="1500" b="1" dirty="0">
                 <a:solidFill>
-                  <a:srgbClr val="4C7158"/>
+                  <a:srgbClr val="65713F"/>
                 </a:solidFill>
                 <a:latin typeface="Aptos" pitchFamily="34" charset="0"/>
                 <a:ea typeface="Aptos" pitchFamily="34" charset="-122"/>
@@ -6587,7 +6587,7 @@
             <a:r>
               <a:rPr lang="en-US" sz="1200" dirty="0">
                 <a:solidFill>
-                  <a:srgbClr val="88967B"/>
+                  <a:srgbClr val="756B59"/>
                 </a:solidFill>
                 <a:latin typeface="Aptos" pitchFamily="34" charset="0"/>
                 <a:ea typeface="Aptos" pitchFamily="34" charset="-122"/>
@@ -6615,8 +6615,8 @@
         </p:blipFill>
         <p:spPr>
           <a:xfrm>
-            <a:off x="5943600" y="3368338"/>
-            <a:ext cx="5349240" cy="1812964"/>
+            <a:off x="5943600" y="3077434"/>
+            <a:ext cx="5349240" cy="2394771"/>
           </a:xfrm>
           <a:prstGeom prst="rect">
             <a:avLst/>
@@ -6650,7 +6650,7 @@
             <a:r>
               <a:rPr lang="en-US" sz="900" dirty="0">
                 <a:solidFill>
-                  <a:srgbClr val="88967B"/>
+                  <a:srgbClr val="756B59"/>
                 </a:solidFill>
                 <a:latin typeface="Aptos" pitchFamily="34" charset="0"/>
                 <a:ea typeface="Aptos" pitchFamily="34" charset="-122"/>
@@ -6676,7 +6676,7 @@
     <p:bg>
       <p:bgPr>
         <a:solidFill>
-          <a:srgbClr val="F6F4ED"/>
+          <a:srgbClr val="E5D7B7"/>
         </a:solidFill>
       </p:bgPr>
     </p:bg>
@@ -6721,7 +6721,7 @@
             <a:r>
               <a:rPr lang="en-US" sz="900" spc="100" kern="0" dirty="0">
                 <a:solidFill>
-                  <a:srgbClr val="4C7158"/>
+                  <a:srgbClr val="65713F"/>
                 </a:solidFill>
                 <a:latin typeface="Aptos Mono" pitchFamily="34" charset="0"/>
                 <a:ea typeface="Aptos Mono" pitchFamily="34" charset="-122"/>
@@ -6760,7 +6760,7 @@
             <a:r>
               <a:rPr lang="en-US" sz="800" spc="100" kern="0" dirty="0">
                 <a:solidFill>
-                  <a:srgbClr val="88967B"/>
+                  <a:srgbClr val="756B59"/>
                 </a:solidFill>
                 <a:latin typeface="Aptos" pitchFamily="34" charset="0"/>
                 <a:ea typeface="Aptos" pitchFamily="34" charset="-122"/>
@@ -6789,7 +6789,7 @@
           <a:noFill/>
           <a:ln w="8890">
             <a:solidFill>
-              <a:srgbClr val="DDE1D3"/>
+              <a:srgbClr val="C6B996"/>
             </a:solidFill>
             <a:prstDash val="solid"/>
             <a:headEnd type="none"/>
@@ -6814,7 +6814,7 @@
           <a:noFill/>
           <a:ln w="8890">
             <a:solidFill>
-              <a:srgbClr val="DDE1D3"/>
+              <a:srgbClr val="C6B996"/>
             </a:solidFill>
             <a:prstDash val="solid"/>
             <a:headEnd type="none"/>
@@ -6849,7 +6849,7 @@
             <a:r>
               <a:rPr lang="en-US" sz="800" spc="100" kern="0" dirty="0">
                 <a:solidFill>
-                  <a:srgbClr val="88967B"/>
+                  <a:srgbClr val="756B59"/>
                 </a:solidFill>
                 <a:latin typeface="Aptos" pitchFamily="34" charset="0"/>
                 <a:ea typeface="Aptos" pitchFamily="34" charset="-122"/>
@@ -6888,7 +6888,7 @@
             <a:r>
               <a:rPr lang="en-US" sz="900" dirty="0">
                 <a:solidFill>
-                  <a:srgbClr val="4C7158"/>
+                  <a:srgbClr val="65713F"/>
                 </a:solidFill>
                 <a:latin typeface="Aptos Mono" pitchFamily="34" charset="0"/>
                 <a:ea typeface="Aptos Mono" pitchFamily="34" charset="-122"/>
@@ -6927,7 +6927,7 @@
             <a:r>
               <a:rPr lang="en-US" sz="900" spc="150" kern="0" dirty="0">
                 <a:solidFill>
-                  <a:srgbClr val="88967B"/>
+                  <a:srgbClr val="756B59"/>
                 </a:solidFill>
                 <a:latin typeface="Aptos Mono" pitchFamily="34" charset="0"/>
                 <a:ea typeface="Aptos Mono" pitchFamily="34" charset="-122"/>
@@ -6968,7 +6968,7 @@
             <a:r>
               <a:rPr lang="en-US" sz="3400" dirty="0">
                 <a:solidFill>
-                  <a:srgbClr val="29372E"/>
+                  <a:srgbClr val="3C3836"/>
                 </a:solidFill>
                 <a:latin typeface="Georgia" pitchFamily="34" charset="0"/>
                 <a:ea typeface="Georgia" pitchFamily="34" charset="-122"/>
@@ -7009,7 +7009,7 @@
             <a:r>
               <a:rPr lang="en-US" sz="1600" dirty="0">
                 <a:solidFill>
-                  <a:srgbClr val="88967B"/>
+                  <a:srgbClr val="756B59"/>
                 </a:solidFill>
                 <a:latin typeface="Aptos" pitchFamily="34" charset="0"/>
                 <a:ea typeface="Aptos" pitchFamily="34" charset="-122"/>
@@ -7073,7 +7073,7 @@
             <a:r>
               <a:rPr lang="en-US" sz="900" dirty="0">
                 <a:solidFill>
-                  <a:srgbClr val="BA7758"/>
+                  <a:srgbClr val="AF643C"/>
                 </a:solidFill>
                 <a:latin typeface="Aptos Mono" pitchFamily="34" charset="0"/>
                 <a:ea typeface="Aptos Mono" pitchFamily="34" charset="-122"/>
@@ -7114,7 +7114,7 @@
             <a:r>
               <a:rPr lang="en-US" sz="2300" dirty="0">
                 <a:solidFill>
-                  <a:srgbClr val="29372E"/>
+                  <a:srgbClr val="3C3836"/>
                 </a:solidFill>
                 <a:latin typeface="Georgia" pitchFamily="34" charset="0"/>
                 <a:ea typeface="Georgia" pitchFamily="34" charset="-122"/>
@@ -7155,7 +7155,7 @@
             <a:r>
               <a:rPr lang="en-US" sz="1400" dirty="0">
                 <a:solidFill>
-                  <a:srgbClr val="88967B"/>
+                  <a:srgbClr val="756B59"/>
                 </a:solidFill>
                 <a:latin typeface="Aptos" pitchFamily="34" charset="0"/>
                 <a:ea typeface="Aptos" pitchFamily="34" charset="-122"/>
@@ -7219,7 +7219,7 @@
             <a:r>
               <a:rPr lang="en-US" sz="900" dirty="0">
                 <a:solidFill>
-                  <a:srgbClr val="BA7758"/>
+                  <a:srgbClr val="AF643C"/>
                 </a:solidFill>
                 <a:latin typeface="Aptos Mono" pitchFamily="34" charset="0"/>
                 <a:ea typeface="Aptos Mono" pitchFamily="34" charset="-122"/>
@@ -7260,7 +7260,7 @@
             <a:r>
               <a:rPr lang="en-US" sz="2300" dirty="0">
                 <a:solidFill>
-                  <a:srgbClr val="29372E"/>
+                  <a:srgbClr val="3C3836"/>
                 </a:solidFill>
                 <a:latin typeface="Georgia" pitchFamily="34" charset="0"/>
                 <a:ea typeface="Georgia" pitchFamily="34" charset="-122"/>
@@ -7301,7 +7301,7 @@
             <a:r>
               <a:rPr lang="en-US" sz="1400" dirty="0">
                 <a:solidFill>
-                  <a:srgbClr val="88967B"/>
+                  <a:srgbClr val="756B59"/>
                 </a:solidFill>
                 <a:latin typeface="Aptos" pitchFamily="34" charset="0"/>
                 <a:ea typeface="Aptos" pitchFamily="34" charset="-122"/>
@@ -7365,7 +7365,7 @@
             <a:r>
               <a:rPr lang="en-US" sz="900" dirty="0">
                 <a:solidFill>
-                  <a:srgbClr val="BA7758"/>
+                  <a:srgbClr val="AF643C"/>
                 </a:solidFill>
                 <a:latin typeface="Aptos Mono" pitchFamily="34" charset="0"/>
                 <a:ea typeface="Aptos Mono" pitchFamily="34" charset="-122"/>
@@ -7406,7 +7406,7 @@
             <a:r>
               <a:rPr lang="en-US" sz="2300" dirty="0">
                 <a:solidFill>
-                  <a:srgbClr val="29372E"/>
+                  <a:srgbClr val="3C3836"/>
                 </a:solidFill>
                 <a:latin typeface="Georgia" pitchFamily="34" charset="0"/>
                 <a:ea typeface="Georgia" pitchFamily="34" charset="-122"/>
@@ -7447,7 +7447,7 @@
             <a:r>
               <a:rPr lang="en-US" sz="1400" dirty="0">
                 <a:solidFill>
-                  <a:srgbClr val="88967B"/>
+                  <a:srgbClr val="756B59"/>
                 </a:solidFill>
                 <a:latin typeface="Aptos" pitchFamily="34" charset="0"/>
                 <a:ea typeface="Aptos" pitchFamily="34" charset="-122"/>
@@ -7488,7 +7488,7 @@
             <a:r>
               <a:rPr lang="en-US" sz="1900" i="1" dirty="0">
                 <a:solidFill>
-                  <a:srgbClr val="4C7158"/>
+                  <a:srgbClr val="65713F"/>
                 </a:solidFill>
                 <a:latin typeface="Georgia" pitchFamily="34" charset="0"/>
                 <a:ea typeface="Georgia" pitchFamily="34" charset="-122"/>
@@ -7514,7 +7514,7 @@
     <p:bg>
       <p:bgPr>
         <a:solidFill>
-          <a:srgbClr val="F6F4ED"/>
+          <a:srgbClr val="E5D7B7"/>
         </a:solidFill>
       </p:bgPr>
     </p:bg>
@@ -7559,7 +7559,7 @@
             <a:r>
               <a:rPr lang="en-US" sz="900" spc="100" kern="0" dirty="0">
                 <a:solidFill>
-                  <a:srgbClr val="4C7158"/>
+                  <a:srgbClr val="65713F"/>
                 </a:solidFill>
                 <a:latin typeface="Aptos Mono" pitchFamily="34" charset="0"/>
                 <a:ea typeface="Aptos Mono" pitchFamily="34" charset="-122"/>
@@ -7598,7 +7598,7 @@
             <a:r>
               <a:rPr lang="en-US" sz="800" spc="100" kern="0" dirty="0">
                 <a:solidFill>
-                  <a:srgbClr val="88967B"/>
+                  <a:srgbClr val="756B59"/>
                 </a:solidFill>
                 <a:latin typeface="Aptos" pitchFamily="34" charset="0"/>
                 <a:ea typeface="Aptos" pitchFamily="34" charset="-122"/>
@@ -7627,7 +7627,7 @@
           <a:noFill/>
           <a:ln w="8890">
             <a:solidFill>
-              <a:srgbClr val="DDE1D3"/>
+              <a:srgbClr val="C6B996"/>
             </a:solidFill>
             <a:prstDash val="solid"/>
             <a:headEnd type="none"/>
@@ -7652,7 +7652,7 @@
           <a:noFill/>
           <a:ln w="8890">
             <a:solidFill>
-              <a:srgbClr val="DDE1D3"/>
+              <a:srgbClr val="C6B996"/>
             </a:solidFill>
             <a:prstDash val="solid"/>
             <a:headEnd type="none"/>
@@ -7687,7 +7687,7 @@
             <a:r>
               <a:rPr lang="en-US" sz="800" spc="100" kern="0" dirty="0">
                 <a:solidFill>
-                  <a:srgbClr val="88967B"/>
+                  <a:srgbClr val="756B59"/>
                 </a:solidFill>
                 <a:latin typeface="Aptos" pitchFamily="34" charset="0"/>
                 <a:ea typeface="Aptos" pitchFamily="34" charset="-122"/>
@@ -7726,7 +7726,7 @@
             <a:r>
               <a:rPr lang="en-US" sz="900" dirty="0">
                 <a:solidFill>
-                  <a:srgbClr val="4C7158"/>
+                  <a:srgbClr val="65713F"/>
                 </a:solidFill>
                 <a:latin typeface="Aptos Mono" pitchFamily="34" charset="0"/>
                 <a:ea typeface="Aptos Mono" pitchFamily="34" charset="-122"/>
@@ -7765,7 +7765,7 @@
             <a:r>
               <a:rPr lang="en-US" sz="900" spc="150" kern="0" dirty="0">
                 <a:solidFill>
-                  <a:srgbClr val="88967B"/>
+                  <a:srgbClr val="756B59"/>
                 </a:solidFill>
                 <a:latin typeface="Aptos Mono" pitchFamily="34" charset="0"/>
                 <a:ea typeface="Aptos Mono" pitchFamily="34" charset="-122"/>
@@ -7806,7 +7806,7 @@
             <a:r>
               <a:rPr lang="en-US" sz="3400" dirty="0">
                 <a:solidFill>
-                  <a:srgbClr val="29372E"/>
+                  <a:srgbClr val="3C3836"/>
                 </a:solidFill>
                 <a:latin typeface="Georgia" pitchFamily="34" charset="0"/>
                 <a:ea typeface="Georgia" pitchFamily="34" charset="-122"/>
@@ -7847,7 +7847,7 @@
             <a:r>
               <a:rPr lang="en-US" sz="1600" dirty="0">
                 <a:solidFill>
-                  <a:srgbClr val="88967B"/>
+                  <a:srgbClr val="756B59"/>
                 </a:solidFill>
                 <a:latin typeface="Aptos" pitchFamily="34" charset="0"/>
                 <a:ea typeface="Aptos" pitchFamily="34" charset="-122"/>
@@ -7911,7 +7911,7 @@
             <a:r>
               <a:rPr lang="en-US" sz="900" dirty="0">
                 <a:solidFill>
-                  <a:srgbClr val="BA7758"/>
+                  <a:srgbClr val="AF643C"/>
                 </a:solidFill>
                 <a:latin typeface="Aptos Mono" pitchFamily="34" charset="0"/>
                 <a:ea typeface="Aptos Mono" pitchFamily="34" charset="-122"/>
@@ -7952,7 +7952,7 @@
             <a:r>
               <a:rPr lang="en-US" sz="2300" dirty="0">
                 <a:solidFill>
-                  <a:srgbClr val="29372E"/>
+                  <a:srgbClr val="3C3836"/>
                 </a:solidFill>
                 <a:latin typeface="Georgia" pitchFamily="34" charset="0"/>
                 <a:ea typeface="Georgia" pitchFamily="34" charset="-122"/>
@@ -7993,7 +7993,7 @@
             <a:r>
               <a:rPr lang="en-US" sz="1400" dirty="0">
                 <a:solidFill>
-                  <a:srgbClr val="88967B"/>
+                  <a:srgbClr val="756B59"/>
                 </a:solidFill>
                 <a:latin typeface="Aptos" pitchFamily="34" charset="0"/>
                 <a:ea typeface="Aptos" pitchFamily="34" charset="-122"/>
@@ -8057,7 +8057,7 @@
             <a:r>
               <a:rPr lang="en-US" sz="900" dirty="0">
                 <a:solidFill>
-                  <a:srgbClr val="BA7758"/>
+                  <a:srgbClr val="AF643C"/>
                 </a:solidFill>
                 <a:latin typeface="Aptos Mono" pitchFamily="34" charset="0"/>
                 <a:ea typeface="Aptos Mono" pitchFamily="34" charset="-122"/>
@@ -8098,7 +8098,7 @@
             <a:r>
               <a:rPr lang="en-US" sz="2300" dirty="0">
                 <a:solidFill>
-                  <a:srgbClr val="29372E"/>
+                  <a:srgbClr val="3C3836"/>
                 </a:solidFill>
                 <a:latin typeface="Georgia" pitchFamily="34" charset="0"/>
                 <a:ea typeface="Georgia" pitchFamily="34" charset="-122"/>
@@ -8139,7 +8139,7 @@
             <a:r>
               <a:rPr lang="en-US" sz="1400" dirty="0">
                 <a:solidFill>
-                  <a:srgbClr val="88967B"/>
+                  <a:srgbClr val="756B59"/>
                 </a:solidFill>
                 <a:latin typeface="Aptos" pitchFamily="34" charset="0"/>
                 <a:ea typeface="Aptos" pitchFamily="34" charset="-122"/>
@@ -8203,7 +8203,7 @@
             <a:r>
               <a:rPr lang="en-US" sz="900" dirty="0">
                 <a:solidFill>
-                  <a:srgbClr val="BA7758"/>
+                  <a:srgbClr val="AF643C"/>
                 </a:solidFill>
                 <a:latin typeface="Aptos Mono" pitchFamily="34" charset="0"/>
                 <a:ea typeface="Aptos Mono" pitchFamily="34" charset="-122"/>
@@ -8244,7 +8244,7 @@
             <a:r>
               <a:rPr lang="en-US" sz="2300" dirty="0">
                 <a:solidFill>
-                  <a:srgbClr val="29372E"/>
+                  <a:srgbClr val="3C3836"/>
                 </a:solidFill>
                 <a:latin typeface="Georgia" pitchFamily="34" charset="0"/>
                 <a:ea typeface="Georgia" pitchFamily="34" charset="-122"/>
@@ -8285,7 +8285,7 @@
             <a:r>
               <a:rPr lang="en-US" sz="1400" dirty="0">
                 <a:solidFill>
-                  <a:srgbClr val="88967B"/>
+                  <a:srgbClr val="756B59"/>
                 </a:solidFill>
                 <a:latin typeface="Aptos" pitchFamily="34" charset="0"/>
                 <a:ea typeface="Aptos" pitchFamily="34" charset="-122"/>
@@ -8326,7 +8326,7 @@
             <a:r>
               <a:rPr lang="en-US" sz="1900" i="1" dirty="0">
                 <a:solidFill>
-                  <a:srgbClr val="4C7158"/>
+                  <a:srgbClr val="65713F"/>
                 </a:solidFill>
                 <a:latin typeface="Georgia" pitchFamily="34" charset="0"/>
                 <a:ea typeface="Georgia" pitchFamily="34" charset="-122"/>
@@ -8352,7 +8352,7 @@
     <p:bg>
       <p:bgPr>
         <a:solidFill>
-          <a:srgbClr val="F6F4ED"/>
+          <a:srgbClr val="E5D7B7"/>
         </a:solidFill>
       </p:bgPr>
     </p:bg>
@@ -8397,7 +8397,7 @@
             <a:r>
               <a:rPr lang="en-US" sz="900" spc="100" kern="0" dirty="0">
                 <a:solidFill>
-                  <a:srgbClr val="4C7158"/>
+                  <a:srgbClr val="65713F"/>
                 </a:solidFill>
                 <a:latin typeface="Aptos Mono" pitchFamily="34" charset="0"/>
                 <a:ea typeface="Aptos Mono" pitchFamily="34" charset="-122"/>
@@ -8436,7 +8436,7 @@
             <a:r>
               <a:rPr lang="en-US" sz="800" spc="100" kern="0" dirty="0">
                 <a:solidFill>
-                  <a:srgbClr val="88967B"/>
+                  <a:srgbClr val="756B59"/>
                 </a:solidFill>
                 <a:latin typeface="Aptos" pitchFamily="34" charset="0"/>
                 <a:ea typeface="Aptos" pitchFamily="34" charset="-122"/>
@@ -8465,7 +8465,7 @@
           <a:noFill/>
           <a:ln w="8890">
             <a:solidFill>
-              <a:srgbClr val="DDE1D3"/>
+              <a:srgbClr val="C6B996"/>
             </a:solidFill>
             <a:prstDash val="solid"/>
             <a:headEnd type="none"/>
@@ -8490,7 +8490,7 @@
           <a:noFill/>
           <a:ln w="8890">
             <a:solidFill>
-              <a:srgbClr val="DDE1D3"/>
+              <a:srgbClr val="C6B996"/>
             </a:solidFill>
             <a:prstDash val="solid"/>
             <a:headEnd type="none"/>
@@ -8525,7 +8525,7 @@
             <a:r>
               <a:rPr lang="en-US" sz="800" spc="100" kern="0" dirty="0">
                 <a:solidFill>
-                  <a:srgbClr val="88967B"/>
+                  <a:srgbClr val="756B59"/>
                 </a:solidFill>
                 <a:latin typeface="Aptos" pitchFamily="34" charset="0"/>
                 <a:ea typeface="Aptos" pitchFamily="34" charset="-122"/>
@@ -8564,7 +8564,7 @@
             <a:r>
               <a:rPr lang="en-US" sz="900" dirty="0">
                 <a:solidFill>
-                  <a:srgbClr val="4C7158"/>
+                  <a:srgbClr val="65713F"/>
                 </a:solidFill>
                 <a:latin typeface="Aptos Mono" pitchFamily="34" charset="0"/>
                 <a:ea typeface="Aptos Mono" pitchFamily="34" charset="-122"/>
@@ -8603,7 +8603,7 @@
             <a:r>
               <a:rPr lang="en-US" sz="900" spc="150" kern="0" dirty="0">
                 <a:solidFill>
-                  <a:srgbClr val="88967B"/>
+                  <a:srgbClr val="756B59"/>
                 </a:solidFill>
                 <a:latin typeface="Aptos Mono" pitchFamily="34" charset="0"/>
                 <a:ea typeface="Aptos Mono" pitchFamily="34" charset="-122"/>
@@ -8644,7 +8644,7 @@
             <a:r>
               <a:rPr lang="en-US" sz="3400" dirty="0">
                 <a:solidFill>
-                  <a:srgbClr val="29372E"/>
+                  <a:srgbClr val="3C3836"/>
                 </a:solidFill>
                 <a:latin typeface="Georgia" pitchFamily="34" charset="0"/>
                 <a:ea typeface="Georgia" pitchFamily="34" charset="-122"/>
@@ -8685,7 +8685,7 @@
             <a:r>
               <a:rPr lang="en-US" sz="1600" dirty="0">
                 <a:solidFill>
-                  <a:srgbClr val="88967B"/>
+                  <a:srgbClr val="756B59"/>
                 </a:solidFill>
                 <a:latin typeface="Aptos" pitchFamily="34" charset="0"/>
                 <a:ea typeface="Aptos" pitchFamily="34" charset="-122"/>
@@ -8749,7 +8749,7 @@
             <a:r>
               <a:rPr lang="en-US" sz="900" dirty="0">
                 <a:solidFill>
-                  <a:srgbClr val="BA7758"/>
+                  <a:srgbClr val="AF643C"/>
                 </a:solidFill>
                 <a:latin typeface="Aptos Mono" pitchFamily="34" charset="0"/>
                 <a:ea typeface="Aptos Mono" pitchFamily="34" charset="-122"/>
@@ -8790,7 +8790,7 @@
             <a:r>
               <a:rPr lang="en-US" sz="2300" dirty="0">
                 <a:solidFill>
-                  <a:srgbClr val="29372E"/>
+                  <a:srgbClr val="3C3836"/>
                 </a:solidFill>
                 <a:latin typeface="Georgia" pitchFamily="34" charset="0"/>
                 <a:ea typeface="Georgia" pitchFamily="34" charset="-122"/>
@@ -8831,7 +8831,7 @@
             <a:r>
               <a:rPr lang="en-US" sz="1400" dirty="0">
                 <a:solidFill>
-                  <a:srgbClr val="88967B"/>
+                  <a:srgbClr val="756B59"/>
                 </a:solidFill>
                 <a:latin typeface="Aptos" pitchFamily="34" charset="0"/>
                 <a:ea typeface="Aptos" pitchFamily="34" charset="-122"/>
@@ -8895,7 +8895,7 @@
             <a:r>
               <a:rPr lang="en-US" sz="900" dirty="0">
                 <a:solidFill>
-                  <a:srgbClr val="BA7758"/>
+                  <a:srgbClr val="AF643C"/>
                 </a:solidFill>
                 <a:latin typeface="Aptos Mono" pitchFamily="34" charset="0"/>
                 <a:ea typeface="Aptos Mono" pitchFamily="34" charset="-122"/>
@@ -8936,7 +8936,7 @@
             <a:r>
               <a:rPr lang="en-US" sz="2300" dirty="0">
                 <a:solidFill>
-                  <a:srgbClr val="29372E"/>
+                  <a:srgbClr val="3C3836"/>
                 </a:solidFill>
                 <a:latin typeface="Georgia" pitchFamily="34" charset="0"/>
                 <a:ea typeface="Georgia" pitchFamily="34" charset="-122"/>
@@ -8977,7 +8977,7 @@
             <a:r>
               <a:rPr lang="en-US" sz="1400" dirty="0">
                 <a:solidFill>
-                  <a:srgbClr val="88967B"/>
+                  <a:srgbClr val="756B59"/>
                 </a:solidFill>
                 <a:latin typeface="Aptos" pitchFamily="34" charset="0"/>
                 <a:ea typeface="Aptos" pitchFamily="34" charset="-122"/>
@@ -9041,7 +9041,7 @@
             <a:r>
               <a:rPr lang="en-US" sz="900" dirty="0">
                 <a:solidFill>
-                  <a:srgbClr val="BA7758"/>
+                  <a:srgbClr val="AF643C"/>
                 </a:solidFill>
                 <a:latin typeface="Aptos Mono" pitchFamily="34" charset="0"/>
                 <a:ea typeface="Aptos Mono" pitchFamily="34" charset="-122"/>
@@ -9082,7 +9082,7 @@
             <a:r>
               <a:rPr lang="en-US" sz="2300" dirty="0">
                 <a:solidFill>
-                  <a:srgbClr val="29372E"/>
+                  <a:srgbClr val="3C3836"/>
                 </a:solidFill>
                 <a:latin typeface="Georgia" pitchFamily="34" charset="0"/>
                 <a:ea typeface="Georgia" pitchFamily="34" charset="-122"/>
@@ -9123,7 +9123,7 @@
             <a:r>
               <a:rPr lang="en-US" sz="1400" dirty="0">
                 <a:solidFill>
-                  <a:srgbClr val="88967B"/>
+                  <a:srgbClr val="756B59"/>
                 </a:solidFill>
                 <a:latin typeface="Aptos" pitchFamily="34" charset="0"/>
                 <a:ea typeface="Aptos" pitchFamily="34" charset="-122"/>
@@ -9164,7 +9164,7 @@
             <a:r>
               <a:rPr lang="en-US" sz="1000" dirty="0">
                 <a:solidFill>
-                  <a:srgbClr val="88967B"/>
+                  <a:srgbClr val="756B59"/>
                 </a:solidFill>
                 <a:latin typeface="Aptos" pitchFamily="34" charset="0"/>
                 <a:ea typeface="Aptos" pitchFamily="34" charset="-122"/>
@@ -9190,7 +9190,7 @@
     <p:bg>
       <p:bgPr>
         <a:solidFill>
-          <a:srgbClr val="F6F4ED"/>
+          <a:srgbClr val="E5D7B7"/>
         </a:solidFill>
       </p:bgPr>
     </p:bg>
@@ -9235,7 +9235,7 @@
             <a:r>
               <a:rPr lang="en-US" sz="900" spc="100" kern="0" dirty="0">
                 <a:solidFill>
-                  <a:srgbClr val="4C7158"/>
+                  <a:srgbClr val="65713F"/>
                 </a:solidFill>
                 <a:latin typeface="Aptos Mono" pitchFamily="34" charset="0"/>
                 <a:ea typeface="Aptos Mono" pitchFamily="34" charset="-122"/>
@@ -9274,7 +9274,7 @@
             <a:r>
               <a:rPr lang="en-US" sz="800" spc="100" kern="0" dirty="0">
                 <a:solidFill>
-                  <a:srgbClr val="88967B"/>
+                  <a:srgbClr val="756B59"/>
                 </a:solidFill>
                 <a:latin typeface="Aptos" pitchFamily="34" charset="0"/>
                 <a:ea typeface="Aptos" pitchFamily="34" charset="-122"/>
@@ -9303,7 +9303,7 @@
           <a:noFill/>
           <a:ln w="8890">
             <a:solidFill>
-              <a:srgbClr val="DDE1D3"/>
+              <a:srgbClr val="C6B996"/>
             </a:solidFill>
             <a:prstDash val="solid"/>
             <a:headEnd type="none"/>
@@ -9328,7 +9328,7 @@
           <a:noFill/>
           <a:ln w="8890">
             <a:solidFill>
-              <a:srgbClr val="DDE1D3"/>
+              <a:srgbClr val="C6B996"/>
             </a:solidFill>
             <a:prstDash val="solid"/>
             <a:headEnd type="none"/>
@@ -9363,7 +9363,7 @@
             <a:r>
               <a:rPr lang="en-US" sz="800" spc="100" kern="0" dirty="0">
                 <a:solidFill>
-                  <a:srgbClr val="88967B"/>
+                  <a:srgbClr val="756B59"/>
                 </a:solidFill>
                 <a:latin typeface="Aptos" pitchFamily="34" charset="0"/>
                 <a:ea typeface="Aptos" pitchFamily="34" charset="-122"/>
@@ -9402,7 +9402,7 @@
             <a:r>
               <a:rPr lang="en-US" sz="900" dirty="0">
                 <a:solidFill>
-                  <a:srgbClr val="4C7158"/>
+                  <a:srgbClr val="65713F"/>
                 </a:solidFill>
                 <a:latin typeface="Aptos Mono" pitchFamily="34" charset="0"/>
                 <a:ea typeface="Aptos Mono" pitchFamily="34" charset="-122"/>
@@ -9441,7 +9441,7 @@
             <a:r>
               <a:rPr lang="en-US" sz="900" spc="150" kern="0" dirty="0">
                 <a:solidFill>
-                  <a:srgbClr val="88967B"/>
+                  <a:srgbClr val="756B59"/>
                 </a:solidFill>
                 <a:latin typeface="Aptos Mono" pitchFamily="34" charset="0"/>
                 <a:ea typeface="Aptos Mono" pitchFamily="34" charset="-122"/>
@@ -9482,7 +9482,7 @@
             <a:r>
               <a:rPr lang="en-US" sz="3400" dirty="0">
                 <a:solidFill>
-                  <a:srgbClr val="29372E"/>
+                  <a:srgbClr val="3C3836"/>
                 </a:solidFill>
                 <a:latin typeface="Georgia" pitchFamily="34" charset="0"/>
                 <a:ea typeface="Georgia" pitchFamily="34" charset="-122"/>
@@ -9523,7 +9523,7 @@
             <a:r>
               <a:rPr lang="en-US" sz="1600" dirty="0">
                 <a:solidFill>
-                  <a:srgbClr val="88967B"/>
+                  <a:srgbClr val="756B59"/>
                 </a:solidFill>
                 <a:latin typeface="Aptos" pitchFamily="34" charset="0"/>
                 <a:ea typeface="Aptos" pitchFamily="34" charset="-122"/>
@@ -9587,7 +9587,7 @@
             <a:r>
               <a:rPr lang="en-US" sz="900" dirty="0">
                 <a:solidFill>
-                  <a:srgbClr val="BA7758"/>
+                  <a:srgbClr val="AF643C"/>
                 </a:solidFill>
                 <a:latin typeface="Aptos Mono" pitchFamily="34" charset="0"/>
                 <a:ea typeface="Aptos Mono" pitchFamily="34" charset="-122"/>
@@ -9628,7 +9628,7 @@
             <a:r>
               <a:rPr lang="en-US" sz="2300" dirty="0">
                 <a:solidFill>
-                  <a:srgbClr val="29372E"/>
+                  <a:srgbClr val="3C3836"/>
                 </a:solidFill>
                 <a:latin typeface="Georgia" pitchFamily="34" charset="0"/>
                 <a:ea typeface="Georgia" pitchFamily="34" charset="-122"/>
@@ -9669,7 +9669,7 @@
             <a:r>
               <a:rPr lang="en-US" sz="1400" dirty="0">
                 <a:solidFill>
-                  <a:srgbClr val="88967B"/>
+                  <a:srgbClr val="756B59"/>
                 </a:solidFill>
                 <a:latin typeface="Aptos" pitchFamily="34" charset="0"/>
                 <a:ea typeface="Aptos" pitchFamily="34" charset="-122"/>
@@ -9733,7 +9733,7 @@
             <a:r>
               <a:rPr lang="en-US" sz="900" dirty="0">
                 <a:solidFill>
-                  <a:srgbClr val="BA7758"/>
+                  <a:srgbClr val="AF643C"/>
                 </a:solidFill>
                 <a:latin typeface="Aptos Mono" pitchFamily="34" charset="0"/>
                 <a:ea typeface="Aptos Mono" pitchFamily="34" charset="-122"/>
@@ -9774,7 +9774,7 @@
             <a:r>
               <a:rPr lang="en-US" sz="2300" dirty="0">
                 <a:solidFill>
-                  <a:srgbClr val="29372E"/>
+                  <a:srgbClr val="3C3836"/>
                 </a:solidFill>
                 <a:latin typeface="Georgia" pitchFamily="34" charset="0"/>
                 <a:ea typeface="Georgia" pitchFamily="34" charset="-122"/>
@@ -9815,7 +9815,7 @@
             <a:r>
               <a:rPr lang="en-US" sz="1400" dirty="0">
                 <a:solidFill>
-                  <a:srgbClr val="88967B"/>
+                  <a:srgbClr val="756B59"/>
                 </a:solidFill>
                 <a:latin typeface="Aptos" pitchFamily="34" charset="0"/>
                 <a:ea typeface="Aptos" pitchFamily="34" charset="-122"/>
@@ -9879,7 +9879,7 @@
             <a:r>
               <a:rPr lang="en-US" sz="900" dirty="0">
                 <a:solidFill>
-                  <a:srgbClr val="BA7758"/>
+                  <a:srgbClr val="AF643C"/>
                 </a:solidFill>
                 <a:latin typeface="Aptos Mono" pitchFamily="34" charset="0"/>
                 <a:ea typeface="Aptos Mono" pitchFamily="34" charset="-122"/>
@@ -9920,7 +9920,7 @@
             <a:r>
               <a:rPr lang="en-US" sz="2300" dirty="0">
                 <a:solidFill>
-                  <a:srgbClr val="29372E"/>
+                  <a:srgbClr val="3C3836"/>
                 </a:solidFill>
                 <a:latin typeface="Georgia" pitchFamily="34" charset="0"/>
                 <a:ea typeface="Georgia" pitchFamily="34" charset="-122"/>
@@ -9961,7 +9961,7 @@
             <a:r>
               <a:rPr lang="en-US" sz="1400" dirty="0">
                 <a:solidFill>
-                  <a:srgbClr val="88967B"/>
+                  <a:srgbClr val="756B59"/>
                 </a:solidFill>
                 <a:latin typeface="Aptos" pitchFamily="34" charset="0"/>
                 <a:ea typeface="Aptos" pitchFamily="34" charset="-122"/>
@@ -10002,7 +10002,7 @@
             <a:r>
               <a:rPr lang="en-US" sz="1900" i="1" dirty="0">
                 <a:solidFill>
-                  <a:srgbClr val="4C7158"/>
+                  <a:srgbClr val="65713F"/>
                 </a:solidFill>
                 <a:latin typeface="Georgia" pitchFamily="34" charset="0"/>
                 <a:ea typeface="Georgia" pitchFamily="34" charset="-122"/>
@@ -10028,7 +10028,7 @@
     <p:bg>
       <p:bgPr>
         <a:solidFill>
-          <a:srgbClr val="F6F4ED"/>
+          <a:srgbClr val="E5D7B7"/>
         </a:solidFill>
       </p:bgPr>
     </p:bg>
@@ -10073,7 +10073,7 @@
             <a:r>
               <a:rPr lang="en-US" sz="900" spc="100" kern="0" dirty="0">
                 <a:solidFill>
-                  <a:srgbClr val="4C7158"/>
+                  <a:srgbClr val="65713F"/>
                 </a:solidFill>
                 <a:latin typeface="Aptos Mono" pitchFamily="34" charset="0"/>
                 <a:ea typeface="Aptos Mono" pitchFamily="34" charset="-122"/>
@@ -10112,7 +10112,7 @@
             <a:r>
               <a:rPr lang="en-US" sz="800" spc="100" kern="0" dirty="0">
                 <a:solidFill>
-                  <a:srgbClr val="88967B"/>
+                  <a:srgbClr val="756B59"/>
                 </a:solidFill>
                 <a:latin typeface="Aptos" pitchFamily="34" charset="0"/>
                 <a:ea typeface="Aptos" pitchFamily="34" charset="-122"/>
@@ -10141,7 +10141,7 @@
           <a:noFill/>
           <a:ln w="8890">
             <a:solidFill>
-              <a:srgbClr val="DDE1D3"/>
+              <a:srgbClr val="C6B996"/>
             </a:solidFill>
             <a:prstDash val="solid"/>
             <a:headEnd type="none"/>
@@ -10166,7 +10166,7 @@
           <a:noFill/>
           <a:ln w="8890">
             <a:solidFill>
-              <a:srgbClr val="DDE1D3"/>
+              <a:srgbClr val="C6B996"/>
             </a:solidFill>
             <a:prstDash val="solid"/>
             <a:headEnd type="none"/>
@@ -10201,7 +10201,7 @@
             <a:r>
               <a:rPr lang="en-US" sz="800" spc="100" kern="0" dirty="0">
                 <a:solidFill>
-                  <a:srgbClr val="88967B"/>
+                  <a:srgbClr val="756B59"/>
                 </a:solidFill>
                 <a:latin typeface="Aptos" pitchFamily="34" charset="0"/>
                 <a:ea typeface="Aptos" pitchFamily="34" charset="-122"/>
@@ -10240,7 +10240,7 @@
             <a:r>
               <a:rPr lang="en-US" sz="900" dirty="0">
                 <a:solidFill>
-                  <a:srgbClr val="4C7158"/>
+                  <a:srgbClr val="65713F"/>
                 </a:solidFill>
                 <a:latin typeface="Aptos Mono" pitchFamily="34" charset="0"/>
                 <a:ea typeface="Aptos Mono" pitchFamily="34" charset="-122"/>
@@ -10279,7 +10279,7 @@
             <a:r>
               <a:rPr lang="en-US" sz="900" spc="150" kern="0" dirty="0">
                 <a:solidFill>
-                  <a:srgbClr val="88967B"/>
+                  <a:srgbClr val="756B59"/>
                 </a:solidFill>
                 <a:latin typeface="Aptos Mono" pitchFamily="34" charset="0"/>
                 <a:ea typeface="Aptos Mono" pitchFamily="34" charset="-122"/>
@@ -10320,7 +10320,7 @@
             <a:r>
               <a:rPr lang="en-US" sz="3400" dirty="0">
                 <a:solidFill>
-                  <a:srgbClr val="29372E"/>
+                  <a:srgbClr val="3C3836"/>
                 </a:solidFill>
                 <a:latin typeface="Georgia" pitchFamily="34" charset="0"/>
                 <a:ea typeface="Georgia" pitchFamily="34" charset="-122"/>
@@ -10361,7 +10361,7 @@
             <a:r>
               <a:rPr lang="en-US" sz="1600" dirty="0">
                 <a:solidFill>
-                  <a:srgbClr val="88967B"/>
+                  <a:srgbClr val="756B59"/>
                 </a:solidFill>
                 <a:latin typeface="Aptos" pitchFamily="34" charset="0"/>
                 <a:ea typeface="Aptos" pitchFamily="34" charset="-122"/>
@@ -10425,7 +10425,7 @@
             <a:r>
               <a:rPr lang="en-US" sz="900" dirty="0">
                 <a:solidFill>
-                  <a:srgbClr val="BA7758"/>
+                  <a:srgbClr val="AF643C"/>
                 </a:solidFill>
                 <a:latin typeface="Aptos Mono" pitchFamily="34" charset="0"/>
                 <a:ea typeface="Aptos Mono" pitchFamily="34" charset="-122"/>
@@ -10466,7 +10466,7 @@
             <a:r>
               <a:rPr lang="en-US" sz="2300" dirty="0">
                 <a:solidFill>
-                  <a:srgbClr val="29372E"/>
+                  <a:srgbClr val="3C3836"/>
                 </a:solidFill>
                 <a:latin typeface="Georgia" pitchFamily="34" charset="0"/>
                 <a:ea typeface="Georgia" pitchFamily="34" charset="-122"/>
@@ -10507,7 +10507,7 @@
             <a:r>
               <a:rPr lang="en-US" sz="1400" dirty="0">
                 <a:solidFill>
-                  <a:srgbClr val="88967B"/>
+                  <a:srgbClr val="756B59"/>
                 </a:solidFill>
                 <a:latin typeface="Aptos" pitchFamily="34" charset="0"/>
                 <a:ea typeface="Aptos" pitchFamily="34" charset="-122"/>
@@ -10571,7 +10571,7 @@
             <a:r>
               <a:rPr lang="en-US" sz="900" dirty="0">
                 <a:solidFill>
-                  <a:srgbClr val="BA7758"/>
+                  <a:srgbClr val="AF643C"/>
                 </a:solidFill>
                 <a:latin typeface="Aptos Mono" pitchFamily="34" charset="0"/>
                 <a:ea typeface="Aptos Mono" pitchFamily="34" charset="-122"/>
@@ -10612,7 +10612,7 @@
             <a:r>
               <a:rPr lang="en-US" sz="2300" dirty="0">
                 <a:solidFill>
-                  <a:srgbClr val="29372E"/>
+                  <a:srgbClr val="3C3836"/>
                 </a:solidFill>
                 <a:latin typeface="Georgia" pitchFamily="34" charset="0"/>
                 <a:ea typeface="Georgia" pitchFamily="34" charset="-122"/>
@@ -10653,7 +10653,7 @@
             <a:r>
               <a:rPr lang="en-US" sz="1400" dirty="0">
                 <a:solidFill>
-                  <a:srgbClr val="88967B"/>
+                  <a:srgbClr val="756B59"/>
                 </a:solidFill>
                 <a:latin typeface="Aptos" pitchFamily="34" charset="0"/>
                 <a:ea typeface="Aptos" pitchFamily="34" charset="-122"/>
@@ -10717,7 +10717,7 @@
             <a:r>
               <a:rPr lang="en-US" sz="900" dirty="0">
                 <a:solidFill>
-                  <a:srgbClr val="BA7758"/>
+                  <a:srgbClr val="AF643C"/>
                 </a:solidFill>
                 <a:latin typeface="Aptos Mono" pitchFamily="34" charset="0"/>
                 <a:ea typeface="Aptos Mono" pitchFamily="34" charset="-122"/>
@@ -10758,7 +10758,7 @@
             <a:r>
               <a:rPr lang="en-US" sz="2300" dirty="0">
                 <a:solidFill>
-                  <a:srgbClr val="29372E"/>
+                  <a:srgbClr val="3C3836"/>
                 </a:solidFill>
                 <a:latin typeface="Georgia" pitchFamily="34" charset="0"/>
                 <a:ea typeface="Georgia" pitchFamily="34" charset="-122"/>
@@ -10799,7 +10799,7 @@
             <a:r>
               <a:rPr lang="en-US" sz="1400" dirty="0">
                 <a:solidFill>
-                  <a:srgbClr val="88967B"/>
+                  <a:srgbClr val="756B59"/>
                 </a:solidFill>
                 <a:latin typeface="Aptos" pitchFamily="34" charset="0"/>
                 <a:ea typeface="Aptos" pitchFamily="34" charset="-122"/>
@@ -10840,7 +10840,7 @@
             <a:r>
               <a:rPr lang="en-US" sz="1900" i="1" dirty="0">
                 <a:solidFill>
-                  <a:srgbClr val="4C7158"/>
+                  <a:srgbClr val="65713F"/>
                 </a:solidFill>
                 <a:latin typeface="Georgia" pitchFamily="34" charset="0"/>
                 <a:ea typeface="Georgia" pitchFamily="34" charset="-122"/>
@@ -10866,7 +10866,7 @@
     <p:bg>
       <p:bgPr>
         <a:solidFill>
-          <a:srgbClr val="F6F4ED"/>
+          <a:srgbClr val="E5D7B7"/>
         </a:solidFill>
       </p:bgPr>
     </p:bg>
@@ -10911,7 +10911,7 @@
             <a:r>
               <a:rPr lang="en-US" sz="900" spc="100" kern="0" dirty="0">
                 <a:solidFill>
-                  <a:srgbClr val="4C7158"/>
+                  <a:srgbClr val="65713F"/>
                 </a:solidFill>
                 <a:latin typeface="Aptos Mono" pitchFamily="34" charset="0"/>
                 <a:ea typeface="Aptos Mono" pitchFamily="34" charset="-122"/>
@@ -10950,7 +10950,7 @@
             <a:r>
               <a:rPr lang="en-US" sz="800" spc="100" kern="0" dirty="0">
                 <a:solidFill>
-                  <a:srgbClr val="88967B"/>
+                  <a:srgbClr val="756B59"/>
                 </a:solidFill>
                 <a:latin typeface="Aptos" pitchFamily="34" charset="0"/>
                 <a:ea typeface="Aptos" pitchFamily="34" charset="-122"/>
@@ -10979,7 +10979,7 @@
           <a:noFill/>
           <a:ln w="8890">
             <a:solidFill>
-              <a:srgbClr val="DDE1D3"/>
+              <a:srgbClr val="C6B996"/>
             </a:solidFill>
             <a:prstDash val="solid"/>
             <a:headEnd type="none"/>
@@ -11004,7 +11004,7 @@
           <a:noFill/>
           <a:ln w="8890">
             <a:solidFill>
-              <a:srgbClr val="DDE1D3"/>
+              <a:srgbClr val="C6B996"/>
             </a:solidFill>
             <a:prstDash val="solid"/>
             <a:headEnd type="none"/>
@@ -11039,7 +11039,7 @@
             <a:r>
               <a:rPr lang="en-US" sz="800" spc="100" kern="0" dirty="0">
                 <a:solidFill>
-                  <a:srgbClr val="88967B"/>
+                  <a:srgbClr val="756B59"/>
                 </a:solidFill>
                 <a:latin typeface="Aptos" pitchFamily="34" charset="0"/>
                 <a:ea typeface="Aptos" pitchFamily="34" charset="-122"/>
@@ -11078,7 +11078,7 @@
             <a:r>
               <a:rPr lang="en-US" sz="900" dirty="0">
                 <a:solidFill>
-                  <a:srgbClr val="4C7158"/>
+                  <a:srgbClr val="65713F"/>
                 </a:solidFill>
                 <a:latin typeface="Aptos Mono" pitchFamily="34" charset="0"/>
                 <a:ea typeface="Aptos Mono" pitchFamily="34" charset="-122"/>
@@ -11117,7 +11117,7 @@
             <a:r>
               <a:rPr lang="en-US" sz="900" spc="150" kern="0" dirty="0">
                 <a:solidFill>
-                  <a:srgbClr val="88967B"/>
+                  <a:srgbClr val="756B59"/>
                 </a:solidFill>
                 <a:latin typeface="Aptos Mono" pitchFamily="34" charset="0"/>
                 <a:ea typeface="Aptos Mono" pitchFamily="34" charset="-122"/>
@@ -11158,7 +11158,7 @@
             <a:r>
               <a:rPr lang="en-US" sz="3400" dirty="0">
                 <a:solidFill>
-                  <a:srgbClr val="29372E"/>
+                  <a:srgbClr val="3C3836"/>
                 </a:solidFill>
                 <a:latin typeface="Georgia" pitchFamily="34" charset="0"/>
                 <a:ea typeface="Georgia" pitchFamily="34" charset="-122"/>
@@ -11199,7 +11199,7 @@
             <a:r>
               <a:rPr lang="en-US" sz="1600" dirty="0">
                 <a:solidFill>
-                  <a:srgbClr val="88967B"/>
+                  <a:srgbClr val="756B59"/>
                 </a:solidFill>
                 <a:latin typeface="Aptos" pitchFamily="34" charset="0"/>
                 <a:ea typeface="Aptos" pitchFamily="34" charset="-122"/>
@@ -11263,7 +11263,7 @@
             <a:r>
               <a:rPr lang="en-US" sz="900" dirty="0">
                 <a:solidFill>
-                  <a:srgbClr val="BA7758"/>
+                  <a:srgbClr val="AF643C"/>
                 </a:solidFill>
                 <a:latin typeface="Aptos Mono" pitchFamily="34" charset="0"/>
                 <a:ea typeface="Aptos Mono" pitchFamily="34" charset="-122"/>
@@ -11304,7 +11304,7 @@
             <a:r>
               <a:rPr lang="en-US" sz="2300" dirty="0">
                 <a:solidFill>
-                  <a:srgbClr val="29372E"/>
+                  <a:srgbClr val="3C3836"/>
                 </a:solidFill>
                 <a:latin typeface="Georgia" pitchFamily="34" charset="0"/>
                 <a:ea typeface="Georgia" pitchFamily="34" charset="-122"/>
@@ -11345,7 +11345,7 @@
             <a:r>
               <a:rPr lang="en-US" sz="1400" dirty="0">
                 <a:solidFill>
-                  <a:srgbClr val="88967B"/>
+                  <a:srgbClr val="756B59"/>
                 </a:solidFill>
                 <a:latin typeface="Aptos" pitchFamily="34" charset="0"/>
                 <a:ea typeface="Aptos" pitchFamily="34" charset="-122"/>
@@ -11409,7 +11409,7 @@
             <a:r>
               <a:rPr lang="en-US" sz="900" dirty="0">
                 <a:solidFill>
-                  <a:srgbClr val="BA7758"/>
+                  <a:srgbClr val="AF643C"/>
                 </a:solidFill>
                 <a:latin typeface="Aptos Mono" pitchFamily="34" charset="0"/>
                 <a:ea typeface="Aptos Mono" pitchFamily="34" charset="-122"/>
@@ -11450,7 +11450,7 @@
             <a:r>
               <a:rPr lang="en-US" sz="2300" dirty="0">
                 <a:solidFill>
-                  <a:srgbClr val="29372E"/>
+                  <a:srgbClr val="3C3836"/>
                 </a:solidFill>
                 <a:latin typeface="Georgia" pitchFamily="34" charset="0"/>
                 <a:ea typeface="Georgia" pitchFamily="34" charset="-122"/>
@@ -11491,7 +11491,7 @@
             <a:r>
               <a:rPr lang="en-US" sz="1400" dirty="0">
                 <a:solidFill>
-                  <a:srgbClr val="88967B"/>
+                  <a:srgbClr val="756B59"/>
                 </a:solidFill>
                 <a:latin typeface="Aptos" pitchFamily="34" charset="0"/>
                 <a:ea typeface="Aptos" pitchFamily="34" charset="-122"/>
@@ -11555,7 +11555,7 @@
             <a:r>
               <a:rPr lang="en-US" sz="900" dirty="0">
                 <a:solidFill>
-                  <a:srgbClr val="BA7758"/>
+                  <a:srgbClr val="AF643C"/>
                 </a:solidFill>
                 <a:latin typeface="Aptos Mono" pitchFamily="34" charset="0"/>
                 <a:ea typeface="Aptos Mono" pitchFamily="34" charset="-122"/>
@@ -11596,7 +11596,7 @@
             <a:r>
               <a:rPr lang="en-US" sz="2300" dirty="0">
                 <a:solidFill>
-                  <a:srgbClr val="29372E"/>
+                  <a:srgbClr val="3C3836"/>
                 </a:solidFill>
                 <a:latin typeface="Georgia" pitchFamily="34" charset="0"/>
                 <a:ea typeface="Georgia" pitchFamily="34" charset="-122"/>
@@ -11637,7 +11637,7 @@
             <a:r>
               <a:rPr lang="en-US" sz="1400" dirty="0">
                 <a:solidFill>
-                  <a:srgbClr val="88967B"/>
+                  <a:srgbClr val="756B59"/>
                 </a:solidFill>
                 <a:latin typeface="Aptos" pitchFamily="34" charset="0"/>
                 <a:ea typeface="Aptos" pitchFamily="34" charset="-122"/>
@@ -11678,7 +11678,7 @@
             <a:r>
               <a:rPr lang="en-US" sz="1900" i="1" dirty="0">
                 <a:solidFill>
-                  <a:srgbClr val="4C7158"/>
+                  <a:srgbClr val="65713F"/>
                 </a:solidFill>
                 <a:latin typeface="Georgia" pitchFamily="34" charset="0"/>
                 <a:ea typeface="Georgia" pitchFamily="34" charset="-122"/>
@@ -11704,7 +11704,7 @@
     <p:bg>
       <p:bgPr>
         <a:solidFill>
-          <a:srgbClr val="F6F4ED"/>
+          <a:srgbClr val="E5D7B7"/>
         </a:solidFill>
       </p:bgPr>
     </p:bg>
@@ -11749,7 +11749,7 @@
             <a:r>
               <a:rPr lang="en-US" sz="900" spc="100" kern="0" dirty="0">
                 <a:solidFill>
-                  <a:srgbClr val="4C7158"/>
+                  <a:srgbClr val="65713F"/>
                 </a:solidFill>
                 <a:latin typeface="Aptos Mono" pitchFamily="34" charset="0"/>
                 <a:ea typeface="Aptos Mono" pitchFamily="34" charset="-122"/>
@@ -11788,7 +11788,7 @@
             <a:r>
               <a:rPr lang="en-US" sz="800" spc="100" kern="0" dirty="0">
                 <a:solidFill>
-                  <a:srgbClr val="88967B"/>
+                  <a:srgbClr val="756B59"/>
                 </a:solidFill>
                 <a:latin typeface="Aptos" pitchFamily="34" charset="0"/>
                 <a:ea typeface="Aptos" pitchFamily="34" charset="-122"/>
@@ -11817,7 +11817,7 @@
           <a:noFill/>
           <a:ln w="8890">
             <a:solidFill>
-              <a:srgbClr val="DDE1D3"/>
+              <a:srgbClr val="C6B996"/>
             </a:solidFill>
             <a:prstDash val="solid"/>
             <a:headEnd type="none"/>
@@ -11842,7 +11842,7 @@
           <a:noFill/>
           <a:ln w="8890">
             <a:solidFill>
-              <a:srgbClr val="DDE1D3"/>
+              <a:srgbClr val="C6B996"/>
             </a:solidFill>
             <a:prstDash val="solid"/>
             <a:headEnd type="none"/>
@@ -11877,7 +11877,7 @@
             <a:r>
               <a:rPr lang="en-US" sz="800" spc="100" kern="0" dirty="0">
                 <a:solidFill>
-                  <a:srgbClr val="88967B"/>
+                  <a:srgbClr val="756B59"/>
                 </a:solidFill>
                 <a:latin typeface="Aptos" pitchFamily="34" charset="0"/>
                 <a:ea typeface="Aptos" pitchFamily="34" charset="-122"/>
@@ -11916,7 +11916,7 @@
             <a:r>
               <a:rPr lang="en-US" sz="900" dirty="0">
                 <a:solidFill>
-                  <a:srgbClr val="4C7158"/>
+                  <a:srgbClr val="65713F"/>
                 </a:solidFill>
                 <a:latin typeface="Aptos Mono" pitchFamily="34" charset="0"/>
                 <a:ea typeface="Aptos Mono" pitchFamily="34" charset="-122"/>
@@ -11955,7 +11955,7 @@
             <a:r>
               <a:rPr lang="en-US" sz="900" spc="150" kern="0" dirty="0">
                 <a:solidFill>
-                  <a:srgbClr val="88967B"/>
+                  <a:srgbClr val="756B59"/>
                 </a:solidFill>
                 <a:latin typeface="Aptos Mono" pitchFamily="34" charset="0"/>
                 <a:ea typeface="Aptos Mono" pitchFamily="34" charset="-122"/>
@@ -11996,7 +11996,7 @@
             <a:r>
               <a:rPr lang="en-US" sz="3400" dirty="0">
                 <a:solidFill>
-                  <a:srgbClr val="29372E"/>
+                  <a:srgbClr val="3C3836"/>
                 </a:solidFill>
                 <a:latin typeface="Georgia" pitchFamily="34" charset="0"/>
                 <a:ea typeface="Georgia" pitchFamily="34" charset="-122"/>
@@ -12037,7 +12037,7 @@
             <a:r>
               <a:rPr lang="en-US" sz="1600" dirty="0">
                 <a:solidFill>
-                  <a:srgbClr val="88967B"/>
+                  <a:srgbClr val="756B59"/>
                 </a:solidFill>
                 <a:latin typeface="Aptos" pitchFamily="34" charset="0"/>
                 <a:ea typeface="Aptos" pitchFamily="34" charset="-122"/>
@@ -12101,7 +12101,7 @@
             <a:r>
               <a:rPr lang="en-US" sz="900" dirty="0">
                 <a:solidFill>
-                  <a:srgbClr val="BA7758"/>
+                  <a:srgbClr val="AF643C"/>
                 </a:solidFill>
                 <a:latin typeface="Aptos Mono" pitchFamily="34" charset="0"/>
                 <a:ea typeface="Aptos Mono" pitchFamily="34" charset="-122"/>
@@ -12142,7 +12142,7 @@
             <a:r>
               <a:rPr lang="en-US" sz="2300" dirty="0">
                 <a:solidFill>
-                  <a:srgbClr val="29372E"/>
+                  <a:srgbClr val="3C3836"/>
                 </a:solidFill>
                 <a:latin typeface="Georgia" pitchFamily="34" charset="0"/>
                 <a:ea typeface="Georgia" pitchFamily="34" charset="-122"/>
@@ -12183,7 +12183,7 @@
             <a:r>
               <a:rPr lang="en-US" sz="1400" dirty="0">
                 <a:solidFill>
-                  <a:srgbClr val="88967B"/>
+                  <a:srgbClr val="756B59"/>
                 </a:solidFill>
                 <a:latin typeface="Aptos" pitchFamily="34" charset="0"/>
                 <a:ea typeface="Aptos" pitchFamily="34" charset="-122"/>
@@ -12247,7 +12247,7 @@
             <a:r>
               <a:rPr lang="en-US" sz="900" dirty="0">
                 <a:solidFill>
-                  <a:srgbClr val="BA7758"/>
+                  <a:srgbClr val="AF643C"/>
                 </a:solidFill>
                 <a:latin typeface="Aptos Mono" pitchFamily="34" charset="0"/>
                 <a:ea typeface="Aptos Mono" pitchFamily="34" charset="-122"/>
@@ -12288,7 +12288,7 @@
             <a:r>
               <a:rPr lang="en-US" sz="2300" dirty="0">
                 <a:solidFill>
-                  <a:srgbClr val="29372E"/>
+                  <a:srgbClr val="3C3836"/>
                 </a:solidFill>
                 <a:latin typeface="Georgia" pitchFamily="34" charset="0"/>
                 <a:ea typeface="Georgia" pitchFamily="34" charset="-122"/>
@@ -12329,7 +12329,7 @@
             <a:r>
               <a:rPr lang="en-US" sz="1400" dirty="0">
                 <a:solidFill>
-                  <a:srgbClr val="88967B"/>
+                  <a:srgbClr val="756B59"/>
                 </a:solidFill>
                 <a:latin typeface="Aptos" pitchFamily="34" charset="0"/>
                 <a:ea typeface="Aptos" pitchFamily="34" charset="-122"/>
@@ -12393,7 +12393,7 @@
             <a:r>
               <a:rPr lang="en-US" sz="900" dirty="0">
                 <a:solidFill>
-                  <a:srgbClr val="BA7758"/>
+                  <a:srgbClr val="AF643C"/>
                 </a:solidFill>
                 <a:latin typeface="Aptos Mono" pitchFamily="34" charset="0"/>
                 <a:ea typeface="Aptos Mono" pitchFamily="34" charset="-122"/>
@@ -12434,7 +12434,7 @@
             <a:r>
               <a:rPr lang="en-US" sz="2300" dirty="0">
                 <a:solidFill>
-                  <a:srgbClr val="29372E"/>
+                  <a:srgbClr val="3C3836"/>
                 </a:solidFill>
                 <a:latin typeface="Georgia" pitchFamily="34" charset="0"/>
                 <a:ea typeface="Georgia" pitchFamily="34" charset="-122"/>
@@ -12475,7 +12475,7 @@
             <a:r>
               <a:rPr lang="en-US" sz="1400" dirty="0">
                 <a:solidFill>
-                  <a:srgbClr val="88967B"/>
+                  <a:srgbClr val="756B59"/>
                 </a:solidFill>
                 <a:latin typeface="Aptos" pitchFamily="34" charset="0"/>
                 <a:ea typeface="Aptos" pitchFamily="34" charset="-122"/>
@@ -12516,7 +12516,7 @@
             <a:r>
               <a:rPr lang="en-US" sz="1900" i="1" dirty="0">
                 <a:solidFill>
-                  <a:srgbClr val="4C7158"/>
+                  <a:srgbClr val="65713F"/>
                 </a:solidFill>
                 <a:latin typeface="Georgia" pitchFamily="34" charset="0"/>
                 <a:ea typeface="Georgia" pitchFamily="34" charset="-122"/>
@@ -12542,7 +12542,7 @@
     <p:bg>
       <p:bgPr>
         <a:solidFill>
-          <a:srgbClr val="F6F4ED"/>
+          <a:srgbClr val="E5D7B7"/>
         </a:solidFill>
       </p:bgPr>
     </p:bg>
@@ -12587,7 +12587,7 @@
             <a:r>
               <a:rPr lang="en-US" sz="900" spc="100" kern="0" dirty="0">
                 <a:solidFill>
-                  <a:srgbClr val="4C7158"/>
+                  <a:srgbClr val="65713F"/>
                 </a:solidFill>
                 <a:latin typeface="Aptos Mono" pitchFamily="34" charset="0"/>
                 <a:ea typeface="Aptos Mono" pitchFamily="34" charset="-122"/>
@@ -12626,7 +12626,7 @@
             <a:r>
               <a:rPr lang="en-US" sz="800" spc="100" kern="0" dirty="0">
                 <a:solidFill>
-                  <a:srgbClr val="88967B"/>
+                  <a:srgbClr val="756B59"/>
                 </a:solidFill>
                 <a:latin typeface="Aptos" pitchFamily="34" charset="0"/>
                 <a:ea typeface="Aptos" pitchFamily="34" charset="-122"/>
@@ -12655,7 +12655,7 @@
           <a:noFill/>
           <a:ln w="8890">
             <a:solidFill>
-              <a:srgbClr val="DDE1D3"/>
+              <a:srgbClr val="C6B996"/>
             </a:solidFill>
             <a:prstDash val="solid"/>
             <a:headEnd type="none"/>
@@ -12680,7 +12680,7 @@
           <a:noFill/>
           <a:ln w="8890">
             <a:solidFill>
-              <a:srgbClr val="DDE1D3"/>
+              <a:srgbClr val="C6B996"/>
             </a:solidFill>
             <a:prstDash val="solid"/>
             <a:headEnd type="none"/>
@@ -12715,7 +12715,7 @@
             <a:r>
               <a:rPr lang="en-US" sz="800" spc="100" kern="0" dirty="0">
                 <a:solidFill>
-                  <a:srgbClr val="88967B"/>
+                  <a:srgbClr val="756B59"/>
                 </a:solidFill>
                 <a:latin typeface="Aptos" pitchFamily="34" charset="0"/>
                 <a:ea typeface="Aptos" pitchFamily="34" charset="-122"/>
@@ -12754,7 +12754,7 @@
             <a:r>
               <a:rPr lang="en-US" sz="900" dirty="0">
                 <a:solidFill>
-                  <a:srgbClr val="4C7158"/>
+                  <a:srgbClr val="65713F"/>
                 </a:solidFill>
                 <a:latin typeface="Aptos Mono" pitchFamily="34" charset="0"/>
                 <a:ea typeface="Aptos Mono" pitchFamily="34" charset="-122"/>
@@ -12793,7 +12793,7 @@
             <a:r>
               <a:rPr lang="en-US" sz="900" spc="150" kern="0" dirty="0">
                 <a:solidFill>
-                  <a:srgbClr val="88967B"/>
+                  <a:srgbClr val="756B59"/>
                 </a:solidFill>
                 <a:latin typeface="Aptos Mono" pitchFamily="34" charset="0"/>
                 <a:ea typeface="Aptos Mono" pitchFamily="34" charset="-122"/>
@@ -12834,7 +12834,7 @@
             <a:r>
               <a:rPr lang="en-US" sz="3400" dirty="0">
                 <a:solidFill>
-                  <a:srgbClr val="29372E"/>
+                  <a:srgbClr val="3C3836"/>
                 </a:solidFill>
                 <a:latin typeface="Georgia" pitchFamily="34" charset="0"/>
                 <a:ea typeface="Georgia" pitchFamily="34" charset="-122"/>
@@ -12875,7 +12875,7 @@
             <a:r>
               <a:rPr lang="en-US" sz="1600" dirty="0">
                 <a:solidFill>
-                  <a:srgbClr val="88967B"/>
+                  <a:srgbClr val="756B59"/>
                 </a:solidFill>
                 <a:latin typeface="Aptos" pitchFamily="34" charset="0"/>
                 <a:ea typeface="Aptos" pitchFamily="34" charset="-122"/>
@@ -12939,7 +12939,7 @@
             <a:r>
               <a:rPr lang="en-US" sz="900" dirty="0">
                 <a:solidFill>
-                  <a:srgbClr val="BA7758"/>
+                  <a:srgbClr val="AF643C"/>
                 </a:solidFill>
                 <a:latin typeface="Aptos Mono" pitchFamily="34" charset="0"/>
                 <a:ea typeface="Aptos Mono" pitchFamily="34" charset="-122"/>
@@ -12980,7 +12980,7 @@
             <a:r>
               <a:rPr lang="en-US" sz="2300" dirty="0">
                 <a:solidFill>
-                  <a:srgbClr val="29372E"/>
+                  <a:srgbClr val="3C3836"/>
                 </a:solidFill>
                 <a:latin typeface="Georgia" pitchFamily="34" charset="0"/>
                 <a:ea typeface="Georgia" pitchFamily="34" charset="-122"/>
@@ -13021,7 +13021,7 @@
             <a:r>
               <a:rPr lang="en-US" sz="1400" dirty="0">
                 <a:solidFill>
-                  <a:srgbClr val="88967B"/>
+                  <a:srgbClr val="756B59"/>
                 </a:solidFill>
                 <a:latin typeface="Aptos" pitchFamily="34" charset="0"/>
                 <a:ea typeface="Aptos" pitchFamily="34" charset="-122"/>
@@ -13085,7 +13085,7 @@
             <a:r>
               <a:rPr lang="en-US" sz="900" dirty="0">
                 <a:solidFill>
-                  <a:srgbClr val="BA7758"/>
+                  <a:srgbClr val="AF643C"/>
                 </a:solidFill>
                 <a:latin typeface="Aptos Mono" pitchFamily="34" charset="0"/>
                 <a:ea typeface="Aptos Mono" pitchFamily="34" charset="-122"/>
@@ -13126,7 +13126,7 @@
             <a:r>
               <a:rPr lang="en-US" sz="2300" dirty="0">
                 <a:solidFill>
-                  <a:srgbClr val="29372E"/>
+                  <a:srgbClr val="3C3836"/>
                 </a:solidFill>
                 <a:latin typeface="Georgia" pitchFamily="34" charset="0"/>
                 <a:ea typeface="Georgia" pitchFamily="34" charset="-122"/>
@@ -13167,7 +13167,7 @@
             <a:r>
               <a:rPr lang="en-US" sz="1400" dirty="0">
                 <a:solidFill>
-                  <a:srgbClr val="88967B"/>
+                  <a:srgbClr val="756B59"/>
                 </a:solidFill>
                 <a:latin typeface="Aptos" pitchFamily="34" charset="0"/>
                 <a:ea typeface="Aptos" pitchFamily="34" charset="-122"/>
@@ -13231,7 +13231,7 @@
             <a:r>
               <a:rPr lang="en-US" sz="900" dirty="0">
                 <a:solidFill>
-                  <a:srgbClr val="BA7758"/>
+                  <a:srgbClr val="AF643C"/>
                 </a:solidFill>
                 <a:latin typeface="Aptos Mono" pitchFamily="34" charset="0"/>
                 <a:ea typeface="Aptos Mono" pitchFamily="34" charset="-122"/>
@@ -13272,7 +13272,7 @@
             <a:r>
               <a:rPr lang="en-US" sz="2300" dirty="0">
                 <a:solidFill>
-                  <a:srgbClr val="29372E"/>
+                  <a:srgbClr val="3C3836"/>
                 </a:solidFill>
                 <a:latin typeface="Georgia" pitchFamily="34" charset="0"/>
                 <a:ea typeface="Georgia" pitchFamily="34" charset="-122"/>
@@ -13313,7 +13313,7 @@
             <a:r>
               <a:rPr lang="en-US" sz="1400" dirty="0">
                 <a:solidFill>
-                  <a:srgbClr val="88967B"/>
+                  <a:srgbClr val="756B59"/>
                 </a:solidFill>
                 <a:latin typeface="Aptos" pitchFamily="34" charset="0"/>
                 <a:ea typeface="Aptos" pitchFamily="34" charset="-122"/>
@@ -13354,7 +13354,7 @@
             <a:r>
               <a:rPr lang="en-US" sz="1900" i="1" dirty="0">
                 <a:solidFill>
-                  <a:srgbClr val="4C7158"/>
+                  <a:srgbClr val="65713F"/>
                 </a:solidFill>
                 <a:latin typeface="Georgia" pitchFamily="34" charset="0"/>
                 <a:ea typeface="Georgia" pitchFamily="34" charset="-122"/>
@@ -13380,7 +13380,7 @@
     <p:bg>
       <p:bgPr>
         <a:solidFill>
-          <a:srgbClr val="F6F4ED"/>
+          <a:srgbClr val="E5D7B7"/>
         </a:solidFill>
       </p:bgPr>
     </p:bg>
@@ -13425,7 +13425,7 @@
             <a:r>
               <a:rPr lang="en-US" sz="900" spc="100" kern="0" dirty="0">
                 <a:solidFill>
-                  <a:srgbClr val="4C7158"/>
+                  <a:srgbClr val="65713F"/>
                 </a:solidFill>
                 <a:latin typeface="Aptos Mono" pitchFamily="34" charset="0"/>
                 <a:ea typeface="Aptos Mono" pitchFamily="34" charset="-122"/>
@@ -13464,7 +13464,7 @@
             <a:r>
               <a:rPr lang="en-US" sz="800" spc="100" kern="0" dirty="0">
                 <a:solidFill>
-                  <a:srgbClr val="88967B"/>
+                  <a:srgbClr val="756B59"/>
                 </a:solidFill>
                 <a:latin typeface="Aptos" pitchFamily="34" charset="0"/>
                 <a:ea typeface="Aptos" pitchFamily="34" charset="-122"/>
@@ -13493,7 +13493,7 @@
           <a:noFill/>
           <a:ln w="8890">
             <a:solidFill>
-              <a:srgbClr val="DDE1D3"/>
+              <a:srgbClr val="C6B996"/>
             </a:solidFill>
             <a:prstDash val="solid"/>
             <a:headEnd type="none"/>
@@ -13518,7 +13518,7 @@
           <a:noFill/>
           <a:ln w="8890">
             <a:solidFill>
-              <a:srgbClr val="DDE1D3"/>
+              <a:srgbClr val="C6B996"/>
             </a:solidFill>
             <a:prstDash val="solid"/>
             <a:headEnd type="none"/>
@@ -13553,7 +13553,7 @@
             <a:r>
               <a:rPr lang="en-US" sz="800" spc="100" kern="0" dirty="0">
                 <a:solidFill>
-                  <a:srgbClr val="88967B"/>
+                  <a:srgbClr val="756B59"/>
                 </a:solidFill>
                 <a:latin typeface="Aptos" pitchFamily="34" charset="0"/>
                 <a:ea typeface="Aptos" pitchFamily="34" charset="-122"/>
@@ -13592,7 +13592,7 @@
             <a:r>
               <a:rPr lang="en-US" sz="900" dirty="0">
                 <a:solidFill>
-                  <a:srgbClr val="4C7158"/>
+                  <a:srgbClr val="65713F"/>
                 </a:solidFill>
                 <a:latin typeface="Aptos Mono" pitchFamily="34" charset="0"/>
                 <a:ea typeface="Aptos Mono" pitchFamily="34" charset="-122"/>
@@ -13631,7 +13631,7 @@
             <a:r>
               <a:rPr lang="en-US" sz="900" spc="150" kern="0" dirty="0">
                 <a:solidFill>
-                  <a:srgbClr val="88967B"/>
+                  <a:srgbClr val="756B59"/>
                 </a:solidFill>
                 <a:latin typeface="Aptos Mono" pitchFamily="34" charset="0"/>
                 <a:ea typeface="Aptos Mono" pitchFamily="34" charset="-122"/>
@@ -13672,7 +13672,7 @@
             <a:r>
               <a:rPr lang="en-US" sz="3400" dirty="0">
                 <a:solidFill>
-                  <a:srgbClr val="29372E"/>
+                  <a:srgbClr val="3C3836"/>
                 </a:solidFill>
                 <a:latin typeface="Georgia" pitchFamily="34" charset="0"/>
                 <a:ea typeface="Georgia" pitchFamily="34" charset="-122"/>
@@ -13713,7 +13713,7 @@
             <a:r>
               <a:rPr lang="en-US" sz="1600" dirty="0">
                 <a:solidFill>
-                  <a:srgbClr val="88967B"/>
+                  <a:srgbClr val="756B59"/>
                 </a:solidFill>
                 <a:latin typeface="Aptos" pitchFamily="34" charset="0"/>
                 <a:ea typeface="Aptos" pitchFamily="34" charset="-122"/>
@@ -13752,7 +13752,7 @@
             <a:r>
               <a:rPr lang="en-US" sz="1500" b="1" dirty="0">
                 <a:solidFill>
-                  <a:srgbClr val="4C7158"/>
+                  <a:srgbClr val="65713F"/>
                 </a:solidFill>
                 <a:latin typeface="Aptos" pitchFamily="34" charset="0"/>
                 <a:ea typeface="Aptos" pitchFamily="34" charset="-122"/>
@@ -13793,7 +13793,7 @@
             <a:r>
               <a:rPr lang="en-US" sz="1200" dirty="0">
                 <a:solidFill>
-                  <a:srgbClr val="88967B"/>
+                  <a:srgbClr val="756B59"/>
                 </a:solidFill>
                 <a:latin typeface="Aptos" pitchFamily="34" charset="0"/>
                 <a:ea typeface="Aptos" pitchFamily="34" charset="-122"/>
@@ -13832,7 +13832,7 @@
             <a:r>
               <a:rPr lang="en-US" sz="1500" b="1" dirty="0">
                 <a:solidFill>
-                  <a:srgbClr val="4C7158"/>
+                  <a:srgbClr val="65713F"/>
                 </a:solidFill>
                 <a:latin typeface="Aptos" pitchFamily="34" charset="0"/>
                 <a:ea typeface="Aptos" pitchFamily="34" charset="-122"/>
@@ -13873,7 +13873,7 @@
             <a:r>
               <a:rPr lang="en-US" sz="1200" dirty="0">
                 <a:solidFill>
-                  <a:srgbClr val="88967B"/>
+                  <a:srgbClr val="756B59"/>
                 </a:solidFill>
                 <a:latin typeface="Aptos" pitchFamily="34" charset="0"/>
                 <a:ea typeface="Aptos" pitchFamily="34" charset="-122"/>
@@ -13912,7 +13912,7 @@
             <a:r>
               <a:rPr lang="en-US" sz="1500" b="1" dirty="0">
                 <a:solidFill>
-                  <a:srgbClr val="4C7158"/>
+                  <a:srgbClr val="65713F"/>
                 </a:solidFill>
                 <a:latin typeface="Aptos" pitchFamily="34" charset="0"/>
                 <a:ea typeface="Aptos" pitchFamily="34" charset="-122"/>
@@ -13953,7 +13953,7 @@
             <a:r>
               <a:rPr lang="en-US" sz="1200" dirty="0">
                 <a:solidFill>
-                  <a:srgbClr val="88967B"/>
+                  <a:srgbClr val="756B59"/>
                 </a:solidFill>
                 <a:latin typeface="Aptos" pitchFamily="34" charset="0"/>
                 <a:ea typeface="Aptos" pitchFamily="34" charset="-122"/>
@@ -13981,8 +13981,8 @@
         </p:blipFill>
         <p:spPr>
           <a:xfrm>
-            <a:off x="5943600" y="3368338"/>
-            <a:ext cx="5349240" cy="1812964"/>
+            <a:off x="5943600" y="3077434"/>
+            <a:ext cx="5349240" cy="2394771"/>
           </a:xfrm>
           <a:prstGeom prst="rect">
             <a:avLst/>
@@ -14018,7 +14018,7 @@
             <a:r>
               <a:rPr lang="en-US" sz="1700" i="1" dirty="0">
                 <a:solidFill>
-                  <a:srgbClr val="4C7158"/>
+                  <a:srgbClr val="65713F"/>
                 </a:solidFill>
                 <a:latin typeface="Georgia" pitchFamily="34" charset="0"/>
                 <a:ea typeface="Georgia" pitchFamily="34" charset="-122"/>
@@ -14044,7 +14044,7 @@
     <p:bg>
       <p:bgPr>
         <a:solidFill>
-          <a:srgbClr val="F6F4ED"/>
+          <a:srgbClr val="E5D7B7"/>
         </a:solidFill>
       </p:bgPr>
     </p:bg>
@@ -14089,7 +14089,7 @@
             <a:r>
               <a:rPr lang="en-US" sz="900" spc="100" kern="0" dirty="0">
                 <a:solidFill>
-                  <a:srgbClr val="4C7158"/>
+                  <a:srgbClr val="65713F"/>
                 </a:solidFill>
                 <a:latin typeface="Aptos Mono" pitchFamily="34" charset="0"/>
                 <a:ea typeface="Aptos Mono" pitchFamily="34" charset="-122"/>
@@ -14128,7 +14128,7 @@
             <a:r>
               <a:rPr lang="en-US" sz="800" spc="100" kern="0" dirty="0">
                 <a:solidFill>
-                  <a:srgbClr val="88967B"/>
+                  <a:srgbClr val="756B59"/>
                 </a:solidFill>
                 <a:latin typeface="Aptos" pitchFamily="34" charset="0"/>
                 <a:ea typeface="Aptos" pitchFamily="34" charset="-122"/>
@@ -14157,7 +14157,7 @@
           <a:noFill/>
           <a:ln w="8890">
             <a:solidFill>
-              <a:srgbClr val="DDE1D3"/>
+              <a:srgbClr val="C6B996"/>
             </a:solidFill>
             <a:prstDash val="solid"/>
             <a:headEnd type="none"/>
@@ -14182,7 +14182,7 @@
           <a:noFill/>
           <a:ln w="8890">
             <a:solidFill>
-              <a:srgbClr val="DDE1D3"/>
+              <a:srgbClr val="C6B996"/>
             </a:solidFill>
             <a:prstDash val="solid"/>
             <a:headEnd type="none"/>
@@ -14217,7 +14217,7 @@
             <a:r>
               <a:rPr lang="en-US" sz="800" spc="100" kern="0" dirty="0">
                 <a:solidFill>
-                  <a:srgbClr val="88967B"/>
+                  <a:srgbClr val="756B59"/>
                 </a:solidFill>
                 <a:latin typeface="Aptos" pitchFamily="34" charset="0"/>
                 <a:ea typeface="Aptos" pitchFamily="34" charset="-122"/>
@@ -14256,7 +14256,7 @@
             <a:r>
               <a:rPr lang="en-US" sz="900" dirty="0">
                 <a:solidFill>
-                  <a:srgbClr val="4C7158"/>
+                  <a:srgbClr val="65713F"/>
                 </a:solidFill>
                 <a:latin typeface="Aptos Mono" pitchFamily="34" charset="0"/>
                 <a:ea typeface="Aptos Mono" pitchFamily="34" charset="-122"/>
@@ -14295,7 +14295,7 @@
             <a:r>
               <a:rPr lang="en-US" sz="900" spc="150" kern="0" dirty="0">
                 <a:solidFill>
-                  <a:srgbClr val="88967B"/>
+                  <a:srgbClr val="756B59"/>
                 </a:solidFill>
                 <a:latin typeface="Aptos Mono" pitchFamily="34" charset="0"/>
                 <a:ea typeface="Aptos Mono" pitchFamily="34" charset="-122"/>
@@ -14336,7 +14336,7 @@
             <a:r>
               <a:rPr lang="en-US" sz="3400" dirty="0">
                 <a:solidFill>
-                  <a:srgbClr val="29372E"/>
+                  <a:srgbClr val="3C3836"/>
                 </a:solidFill>
                 <a:latin typeface="Georgia" pitchFamily="34" charset="0"/>
                 <a:ea typeface="Georgia" pitchFamily="34" charset="-122"/>
@@ -14377,7 +14377,7 @@
             <a:r>
               <a:rPr lang="en-US" sz="1600" dirty="0">
                 <a:solidFill>
-                  <a:srgbClr val="88967B"/>
+                  <a:srgbClr val="756B59"/>
                 </a:solidFill>
                 <a:latin typeface="Aptos" pitchFamily="34" charset="0"/>
                 <a:ea typeface="Aptos" pitchFamily="34" charset="-122"/>
@@ -14416,7 +14416,7 @@
             <a:r>
               <a:rPr lang="en-US" sz="1500" b="1" dirty="0">
                 <a:solidFill>
-                  <a:srgbClr val="4C7158"/>
+                  <a:srgbClr val="65713F"/>
                 </a:solidFill>
                 <a:latin typeface="Aptos" pitchFamily="34" charset="0"/>
                 <a:ea typeface="Aptos" pitchFamily="34" charset="-122"/>
@@ -14457,7 +14457,7 @@
             <a:r>
               <a:rPr lang="en-US" sz="1200" dirty="0">
                 <a:solidFill>
-                  <a:srgbClr val="88967B"/>
+                  <a:srgbClr val="756B59"/>
                 </a:solidFill>
                 <a:latin typeface="Aptos" pitchFamily="34" charset="0"/>
                 <a:ea typeface="Aptos" pitchFamily="34" charset="-122"/>
@@ -14496,7 +14496,7 @@
             <a:r>
               <a:rPr lang="en-US" sz="1500" b="1" dirty="0">
                 <a:solidFill>
-                  <a:srgbClr val="4C7158"/>
+                  <a:srgbClr val="65713F"/>
                 </a:solidFill>
                 <a:latin typeface="Aptos" pitchFamily="34" charset="0"/>
                 <a:ea typeface="Aptos" pitchFamily="34" charset="-122"/>
@@ -14537,7 +14537,7 @@
             <a:r>
               <a:rPr lang="en-US" sz="1200" dirty="0">
                 <a:solidFill>
-                  <a:srgbClr val="88967B"/>
+                  <a:srgbClr val="756B59"/>
                 </a:solidFill>
                 <a:latin typeface="Aptos" pitchFamily="34" charset="0"/>
                 <a:ea typeface="Aptos" pitchFamily="34" charset="-122"/>
@@ -14576,7 +14576,7 @@
             <a:r>
               <a:rPr lang="en-US" sz="1500" b="1" dirty="0">
                 <a:solidFill>
-                  <a:srgbClr val="4C7158"/>
+                  <a:srgbClr val="65713F"/>
                 </a:solidFill>
                 <a:latin typeface="Aptos" pitchFamily="34" charset="0"/>
                 <a:ea typeface="Aptos" pitchFamily="34" charset="-122"/>
@@ -14617,7 +14617,7 @@
             <a:r>
               <a:rPr lang="en-US" sz="1200" dirty="0">
                 <a:solidFill>
-                  <a:srgbClr val="88967B"/>
+                  <a:srgbClr val="756B59"/>
                 </a:solidFill>
                 <a:latin typeface="Aptos" pitchFamily="34" charset="0"/>
                 <a:ea typeface="Aptos" pitchFamily="34" charset="-122"/>
@@ -14645,8 +14645,8 @@
         </p:blipFill>
         <p:spPr>
           <a:xfrm>
-            <a:off x="5943600" y="3160905"/>
-            <a:ext cx="5349240" cy="2227830"/>
+            <a:off x="6168784" y="2926080"/>
+            <a:ext cx="4898872" cy="2697480"/>
           </a:xfrm>
           <a:prstGeom prst="rect">
             <a:avLst/>
@@ -14682,7 +14682,7 @@
             <a:r>
               <a:rPr lang="en-US" sz="1700" i="1" dirty="0">
                 <a:solidFill>
-                  <a:srgbClr val="4C7158"/>
+                  <a:srgbClr val="65713F"/>
                 </a:solidFill>
                 <a:latin typeface="Georgia" pitchFamily="34" charset="0"/>
                 <a:ea typeface="Georgia" pitchFamily="34" charset="-122"/>
@@ -14708,7 +14708,7 @@
     <p:bg>
       <p:bgPr>
         <a:solidFill>
-          <a:srgbClr val="F6F4ED"/>
+          <a:srgbClr val="E5D7B7"/>
         </a:solidFill>
       </p:bgPr>
     </p:bg>
@@ -14753,7 +14753,7 @@
             <a:r>
               <a:rPr lang="en-US" sz="900" spc="100" kern="0" dirty="0">
                 <a:solidFill>
-                  <a:srgbClr val="4C7158"/>
+                  <a:srgbClr val="65713F"/>
                 </a:solidFill>
                 <a:latin typeface="Aptos Mono" pitchFamily="34" charset="0"/>
                 <a:ea typeface="Aptos Mono" pitchFamily="34" charset="-122"/>
@@ -14792,7 +14792,7 @@
             <a:r>
               <a:rPr lang="en-US" sz="800" spc="100" kern="0" dirty="0">
                 <a:solidFill>
-                  <a:srgbClr val="88967B"/>
+                  <a:srgbClr val="756B59"/>
                 </a:solidFill>
                 <a:latin typeface="Aptos" pitchFamily="34" charset="0"/>
                 <a:ea typeface="Aptos" pitchFamily="34" charset="-122"/>
@@ -14821,7 +14821,7 @@
           <a:noFill/>
           <a:ln w="8890">
             <a:solidFill>
-              <a:srgbClr val="DDE1D3"/>
+              <a:srgbClr val="C6B996"/>
             </a:solidFill>
             <a:prstDash val="solid"/>
             <a:headEnd type="none"/>
@@ -14846,7 +14846,7 @@
           <a:noFill/>
           <a:ln w="8890">
             <a:solidFill>
-              <a:srgbClr val="DDE1D3"/>
+              <a:srgbClr val="C6B996"/>
             </a:solidFill>
             <a:prstDash val="solid"/>
             <a:headEnd type="none"/>
@@ -14881,7 +14881,7 @@
             <a:r>
               <a:rPr lang="en-US" sz="800" spc="100" kern="0" dirty="0">
                 <a:solidFill>
-                  <a:srgbClr val="88967B"/>
+                  <a:srgbClr val="756B59"/>
                 </a:solidFill>
                 <a:latin typeface="Aptos" pitchFamily="34" charset="0"/>
                 <a:ea typeface="Aptos" pitchFamily="34" charset="-122"/>
@@ -14920,7 +14920,7 @@
             <a:r>
               <a:rPr lang="en-US" sz="900" dirty="0">
                 <a:solidFill>
-                  <a:srgbClr val="4C7158"/>
+                  <a:srgbClr val="65713F"/>
                 </a:solidFill>
                 <a:latin typeface="Aptos Mono" pitchFamily="34" charset="0"/>
                 <a:ea typeface="Aptos Mono" pitchFamily="34" charset="-122"/>
@@ -14959,7 +14959,7 @@
             <a:r>
               <a:rPr lang="en-US" sz="900" spc="150" kern="0" dirty="0">
                 <a:solidFill>
-                  <a:srgbClr val="88967B"/>
+                  <a:srgbClr val="756B59"/>
                 </a:solidFill>
                 <a:latin typeface="Aptos Mono" pitchFamily="34" charset="0"/>
                 <a:ea typeface="Aptos Mono" pitchFamily="34" charset="-122"/>
@@ -15000,7 +15000,7 @@
             <a:r>
               <a:rPr lang="en-US" sz="3400" dirty="0">
                 <a:solidFill>
-                  <a:srgbClr val="29372E"/>
+                  <a:srgbClr val="3C3836"/>
                 </a:solidFill>
                 <a:latin typeface="Georgia" pitchFamily="34" charset="0"/>
                 <a:ea typeface="Georgia" pitchFamily="34" charset="-122"/>
@@ -15041,7 +15041,7 @@
             <a:r>
               <a:rPr lang="en-US" sz="1600" dirty="0">
                 <a:solidFill>
-                  <a:srgbClr val="88967B"/>
+                  <a:srgbClr val="756B59"/>
                 </a:solidFill>
                 <a:latin typeface="Aptos" pitchFamily="34" charset="0"/>
                 <a:ea typeface="Aptos" pitchFamily="34" charset="-122"/>
@@ -15080,7 +15080,7 @@
             <a:r>
               <a:rPr lang="en-US" sz="1500" b="1" dirty="0">
                 <a:solidFill>
-                  <a:srgbClr val="4C7158"/>
+                  <a:srgbClr val="65713F"/>
                 </a:solidFill>
                 <a:latin typeface="Aptos" pitchFamily="34" charset="0"/>
                 <a:ea typeface="Aptos" pitchFamily="34" charset="-122"/>
@@ -15121,7 +15121,7 @@
             <a:r>
               <a:rPr lang="en-US" sz="1200" dirty="0">
                 <a:solidFill>
-                  <a:srgbClr val="88967B"/>
+                  <a:srgbClr val="756B59"/>
                 </a:solidFill>
                 <a:latin typeface="Aptos" pitchFamily="34" charset="0"/>
                 <a:ea typeface="Aptos" pitchFamily="34" charset="-122"/>
@@ -15160,7 +15160,7 @@
             <a:r>
               <a:rPr lang="en-US" sz="1500" b="1" dirty="0">
                 <a:solidFill>
-                  <a:srgbClr val="4C7158"/>
+                  <a:srgbClr val="65713F"/>
                 </a:solidFill>
                 <a:latin typeface="Aptos" pitchFamily="34" charset="0"/>
                 <a:ea typeface="Aptos" pitchFamily="34" charset="-122"/>
@@ -15201,7 +15201,7 @@
             <a:r>
               <a:rPr lang="en-US" sz="1200" dirty="0">
                 <a:solidFill>
-                  <a:srgbClr val="88967B"/>
+                  <a:srgbClr val="756B59"/>
                 </a:solidFill>
                 <a:latin typeface="Aptos" pitchFamily="34" charset="0"/>
                 <a:ea typeface="Aptos" pitchFamily="34" charset="-122"/>
@@ -15240,7 +15240,7 @@
             <a:r>
               <a:rPr lang="en-US" sz="1500" b="1" dirty="0">
                 <a:solidFill>
-                  <a:srgbClr val="4C7158"/>
+                  <a:srgbClr val="65713F"/>
                 </a:solidFill>
                 <a:latin typeface="Aptos" pitchFamily="34" charset="0"/>
                 <a:ea typeface="Aptos" pitchFamily="34" charset="-122"/>
@@ -15281,7 +15281,7 @@
             <a:r>
               <a:rPr lang="en-US" sz="1200" dirty="0">
                 <a:solidFill>
-                  <a:srgbClr val="88967B"/>
+                  <a:srgbClr val="756B59"/>
                 </a:solidFill>
                 <a:latin typeface="Aptos" pitchFamily="34" charset="0"/>
                 <a:ea typeface="Aptos" pitchFamily="34" charset="-122"/>
@@ -15309,8 +15309,8 @@
         </p:blipFill>
         <p:spPr>
           <a:xfrm>
-            <a:off x="6361483" y="2926080"/>
-            <a:ext cx="4513474" cy="2697480"/>
+            <a:off x="6206544" y="2926080"/>
+            <a:ext cx="4823351" cy="2697480"/>
           </a:xfrm>
           <a:prstGeom prst="rect">
             <a:avLst/>
@@ -15346,7 +15346,7 @@
             <a:r>
               <a:rPr lang="en-US" sz="1700" i="1" dirty="0">
                 <a:solidFill>
-                  <a:srgbClr val="4C7158"/>
+                  <a:srgbClr val="65713F"/>
                 </a:solidFill>
                 <a:latin typeface="Georgia" pitchFamily="34" charset="0"/>
                 <a:ea typeface="Georgia" pitchFamily="34" charset="-122"/>
